--- a/docs/instructor/lab-2a-writing-the-standards-down.pptx
+++ b/docs/instructor/lab-2a-writing-the-standards-down.pptx
@@ -1091,7 +1091,7 @@
           <a:lstStyle/>
           <a:p>
             <a:r>
-              <a:t>[CALIBRATED from Lab 1.b, 2026-08-12: agenda held · prompting depth right · checkpoint gates worked · mostly solo, fine · room waits to be told → 4 seed clauses + 10-min derive] This is the follow-along increment — everyone in the same state before the checkpoint. If anyone skipped the handout prep, now is when it bites: branch `feat/governance`, docs/labs pulled. Circulate; the common stall is over-polishing Context. Ten minutes, hard stop. Fast finishers: point at the stretch — derive the store-boundary clause list early, or review a neighbour's draft Decision. COMMON QUESTIONS — Q: "Same subject as yours — is that not just copying?" A: the MOTION is the point: your prompts, your edit, your Decision sentence, your cost; next week the subject is one nobody has modelled. Q: "What if I disagree with the repository pattern?" A: perfect — record it anyway (Status: Accepted; it IS this repo's reality) and put your objection in Consequences as a cost; recording is not endorsing, and in real life your objection becomes a superseding ADR proposal. Q: "Commit now or at the end?" A: commit to feat/governance now — small commits, one PR at the end of the block. Q: "My ADR came out nearly identical to the demo." A: expected on a shared subject; the checkpoint checks the metadata block, three sections, and a real cost — not originality. ~11 min.</a:t>
+              <a:t>[CALIBRATED from Lab 1.b, 2026-08-12: agenda held · prompting depth right · checkpoint gates worked · mostly solo, fine · room waits to be told → 4 seed clauses + 10-min derive] This is the follow-along increment — everyone in the same state before the checkpoint. If anyone skipped the handout prep, now is when it bites: branch `feat/governance`, docs/labs pulled. Remote circulation: one chat nudge at ~5 min ("stuck on Context? Slack me"); the common stall is over-polishing Context. Ten minutes, hard stop. Fast finishers: point at the stretch — derive the store-boundary clause list early, or review a neighbour's draft Decision. COMMON QUESTIONS — Q: "Same subject as yours — is that not just copying?" A: the MOTION is the point: your prompts, your edit, your Decision sentence, your cost; next week the subject is one nobody has modelled. Q: "What if I disagree with the repository pattern?" A: perfect — record it anyway (Status: Accepted; it IS this repo's reality) and put your objection in Consequences as a cost; recording is not endorsing, and in real life your objection becomes a superseding ADR proposal. Q: "Commit now or at the end?" A: commit to feat/governance now — small commits, one PR at the end of the block. Q: "My ADR came out nearly identical to the demo." A: expected on a shared subject; the checkpoint checks the metadata block, three sections, and a real cost — not originality. ~11 min.</a:t>
             </a:r>
           </a:p>
         </p:txBody>
@@ -1161,7 +1161,7 @@
           <a:lstStyle/>
           <a:p>
             <a:r>
-              <a:t>[CALIBRATED from Lab 1.b, 2026-08-12: agenda held · prompting depth right · checkpoint gates worked · mostly solo, fine · room waits to be told → 4 seed clauses + 10-min derive] Do not advance past unresolved hands. Cheap to verify by walking the room. If more than two people are stuck, the cause is usually prompt shape — show yours again. Fast finishers go to the stretch list (handout): the store-boundary clauses or a peer review. ~3 min.</a:t>
+              <a:t>[CALIBRATED from Lab 1.b, 2026-08-12: agenda held · prompting depth right · checkpoint gates worked · mostly solo, fine · room waits to be told → 4 seed clauses + 10-min derive] Chat is the room-walk: Decision sentences land where you can read them, and a missing name is your signal (Slack them, not the whole call). If more than two people are stuck, the cause is usually prompt shape — show yours again. Fast finishers go to the stretch list (handout): the store-boundary clauses or a peer review. ~3 min.</a:t>
             </a:r>
           </a:p>
         </p:txBody>
@@ -1301,7 +1301,7 @@
           <a:lstStyle/>
           <a:p>
             <a:r>
-              <a:t>[CALIBRATED from Lab 1.b, 2026-08-12: agenda held · prompting depth right · checkpoint gates worked · mostly solo, fine · room waits to be told → 4 seed clauses + 10-min derive] The blocks sum to 120 — keep yourself honest on them. No setup block: everyone arrives ready per the handout (branch created, docs/labs pulled, npm test green) — verify that claim with a ten-second show of hands here, and pair any exception quietly during the Why slide rather than stopping the room. Set expectations: this block is less typing than 1.b and more deciding. Two unusual asks today: read code cold and write a rule from it, and mark which parts of your own rule a machine could not check. Also say once: how you're assessed is on the handout — same five-dimension rubric as Lab 1, counts toward Agentic Developer. ~2 min.</a:t>
+              <a:t>[CALIBRATED from Lab 1.b, 2026-08-12: agenda held · prompting depth right · checkpoint gates worked · mostly solo, fine · room waits to be told → 4 seed clauses + 10-min derive] The blocks sum to 120 — keep yourself honest on them. No setup block: everyone arrives ready per the handout (branch created, docs/labs pulled, npm test green) — verify in chat ("type READY if npm test is green on your branch"), and route any exception to Slack during the Why slide rather than stopping the call. Set expectations: this block is less typing than 1.b and more deciding. Two unusual asks today: read code cold and write a rule from it, and mark which parts of your own rule a machine could not check. Also say once: how you're assessed is on the handout — same five-dimension rubric as Lab 1, counts toward Agentic Developer. ~2 min.</a:t>
             </a:r>
           </a:p>
         </p:txBody>
@@ -1861,7 +1861,7 @@
           <a:lstStyle/>
           <a:p>
             <a:r>
-              <a:t>[CALIBRATED from Lab 1.b, 2026-08-12: agenda held · prompting depth right · checkpoint gates worked · mostly solo, fine · room waits to be told → 4 seed clauses + 10-min derive] Ask each group to read one fuzzy clause and its recorded decision aloud — two minutes, and it makes the standard real. The common failure here: a "Checked by: code review" line on every clause — that is the human gate as a reflex, not a decision; push once: "could a script check THIS one?" Fast finishers: the half-gate stretch (write the ESLint clause) or the rules-file conversion. ~2 min.</a:t>
+              <a:t>[CALIBRATED from Lab 1.b, 2026-08-12: agenda held · prompting depth right · checkpoint gates worked · mostly solo, fine · room waits to be told → 4 seed clauses + 10-min derive] Ask one voice per group to unmute and read a fuzzy clause with its recorded decision — two minutes, and it makes the standard real. The common failure here: a "Checked by: code review" line on every clause — that is the human gate as a reflex, not a decision; push once: "could a script check THIS one?" Fast finishers: the half-gate stretch (write the ESLint clause) or the rules-file conversion. ~2 min.</a:t>
             </a:r>
           </a:p>
         </p:txBody>
@@ -2001,7 +2001,7 @@
           <a:lstStyle/>
           <a:p>
             <a:r>
-              <a:t>[CALIBRATED from Lab 1.b, 2026-08-12: agenda held · prompting depth right · checkpoint gates worked · mostly solo, fine · room waits to be told → 4 seed clauses + 10-min derive] Do not skip this to buy build time — it is the review+capture close Format B requires. INSTRUCTOR, within 24h: file the lab-capture entry (AI-Transformation-Playbook/04-labs/lab-capture-template.md) — what was built, stuck points, timings, refinements. This deck is the Format B pilot; the capture entry is how it gets validated. ~4 min.</a:t>
+              <a:t>[CALIBRATED from Lab 1.b, 2026-08-12: agenda held · prompting depth right · checkpoint gates worked · mostly solo, fine · room waits to be told → 4 seed clauses + 10-min derive] Do not skip this to buy build time — it is the review+capture close Format B requires. COPY THE CHAT BEFORE ENDING THE CALL — Meet deletes it, and the Decision sentences, the AGREED clause list, and the retro lines all feed the capture. INSTRUCTOR, within 24h: file the lab-capture entry (AI-Transformation-Playbook/04-labs/lab-capture-template.md) — what was built, stuck points, timings, refinements. This deck is the Format B pilot; the capture entry is how it gets validated. ~4 min.</a:t>
             </a:r>
           </a:p>
         </p:txBody>
@@ -2071,7 +2071,7 @@
           <a:lstStyle/>
           <a:p>
             <a:r>
-              <a:t>Do not oversell — this room is already positive about AI; the pitch is "stop solving the same problem sixteen times." Land the vocabulary on card 3, once, and reuse it all day: a RULE is what the team agrees on; a DOCUMENT is where the rule lives (one document can hold many rules); a rule written down and agreed is a STANDARD — the same definition the distribution guide uses. Then land the ETH note: the point is not "AI cannot write docs", it is that a doc nobody thought about is negative value. Ask who has run /init and never read the output — hands will go up. Source link is in the handout. ~3 min.</a:t>
+              <a:t>Do not oversell — this room is already positive about AI; the pitch is "stop solving the same problem sixteen times." Land the vocabulary on card 3, once, and reuse it all day: a RULE is what the team agrees on; a DOCUMENT is where the rule lives (one document can hold many rules); a rule written down and agreed is a STANDARD — the same definition the distribution guide uses. Then land the ETH note: the point is not "AI cannot write docs", it is that a doc nobody thought about is negative value. Ask who has run /init and never read the output in chat, as a +1 — the +1s will come. Source link is in the handout. ~3 min.</a:t>
             </a:r>
           </a:p>
         </p:txBody>
@@ -12428,7 +12428,7 @@
                 </a:solidFill>
                 <a:latin typeface="Arial"/>
               </a:rPr>
-              <a:t>Thumbs up, or say so. If your Decision line came out of Claude rather than out of you, rewrite it now — that is the one part of an ADR that cannot be delegated.</a:t>
+              <a:t>Paste your Decision sentence into chat. If it came out of Claude rather than out of you, rewrite it first — that is the one part of an ADR that cannot be delegated.</a:t>
             </a:r>
           </a:p>
         </p:txBody>
@@ -22586,7 +22586,7 @@
                 </a:solidFill>
                 <a:latin typeface="Arial"/>
               </a:rPr>
-              <a:t>Same clause list, different documents — what did each choose to check, and what did they mark?</a:t>
+              <a:t>Same clause list, different documents — screen-share each: what did they choose to check, and what did they mark?</a:t>
             </a:r>
           </a:p>
           <a:p>
@@ -22623,7 +22623,7 @@
                 </a:solidFill>
                 <a:latin typeface="Arial"/>
               </a:rPr>
-              <a:t>What was hard, what was easy? Thirty seconds each, around the room.</a:t>
+              <a:t>What was hard, what was easy? One line each in chat, waterfall style.</a:t>
             </a:r>
           </a:p>
           <a:p>

--- a/docs/instructor/lab-2a-writing-the-standards-down.pptx
+++ b/docs/instructor/lab-2a-writing-the-standards-down.pptx
@@ -1231,7 +1231,7 @@
           <a:lstStyle/>
           <a:p>
             <a:r>
-              <a:t>[CALIBRATED from Lab 1.b, 2026-08-12: agenda held · prompting depth right · checkpoint gates worked · mostly solo, fine · room waits to be told → 4 seed clauses + 10-min derive] Scaffolding drops here — from following along to deciding. Announce the mode change explicitly; it should not be discovered. Say what the next 40 minutes look like in one breath: read three fixes (4 min, silent) -&gt; in groups, turn four seed clauses into your rule (10 min, structured — the clock slide gives the shape) -&gt; we agree one list as a room (4 min) -&gt; each of you writes it up as YOUR OWN NFR (20 min). Nobody is graded on the discussion; everybody ships a document. Full teaching guide for this block — run sheet, scripts, expected-clause bank, recoveries: docs/instructor/lab-2a-derive-teachers-guide.md.</a:t>
+              <a:t>[CALIBRATED from Lab 1.b, 2026-08-12: agenda held · prompting depth right · checkpoint gates worked · mostly solo, fine · room waits to be told → 4 seed clauses + 10-min derive] Scaffolding drops here — from following along to deciding. Announce the mode change explicitly; it should not be discovered. Say what the next 40 minutes look like in one breath: read three fixes (4 min, silent) -&gt; ON YOUR OWN, turn four seed clauses into your rule (10 min, structured — the clock slide gives the shape) -&gt; we compare lists and agree one as a class (4 min) -&gt; each of you writes it up as YOUR OWN NFR (20 min). Individual by design — this course must also work self-guided; the class compare is calibration, not committee work. Full teaching guide for this block — run sheet, scripts, expected-clause bank, recoveries: docs/instructor/lab-2a-derive-teachers-guide.md.</a:t>
             </a:r>
           </a:p>
         </p:txBody>
@@ -1441,7 +1441,7 @@
           <a:lstStyle/>
           <a:p>
             <a:r>
-              <a:t>Present this in ONE minute, then start the clock and circulate — the structure is the mitigation for a room that waits to be told. The catch-test ("which of A/B/C does this clause catch?") replaces a devil's-advocate role: it is self-administering, and any group that runs it honestly discovers that "ships with a test" does not catch B — which is the discovery the exercise exists for. COMMON QUESTIONS — Q: "What does mechanical mean, exactly?" A: a script, given ONLY the diff, could return pass/fail — if you need to know intent, it's fuzzy. Q: "Can a clause be conditional?" A: yes — "docs-only changes are exempt" is a fine clause, and note it: that exemption becomes a CI path filter next week. Q: "What if we all just agree?" A: run the catch-test out loud — which fix does each kept clause catch? If nothing on your list catches B, you are not done. Q: "Does wording matter?" A: substance now, wording when you write the NFR — the group list are raw material, not the document. ~1 min to present.</a:t>
+              <a:t>Present this in ONE minute, then start the clock and circulate — the structure is the mitigation for a cohort that waits to be told — and the INDIVIDUAL shape is deliberate: this course must survive becoming self-guided, and independent verdicts beat one early consensus. The catch-test ("which of A/B/C does this clause catch?") is self-administering: anyone who runs it honestly discovers that "ships with a test" does not catch B — the discovery the exercise exists for. COMMON QUESTIONS — Q: "What does mechanical mean, exactly?" A: a script, given ONLY the diff, could return pass/fail — if you need to know intent, it's fuzzy. Q: "Can a clause be conditional?" A: yes — "docs-only changes are exempt" is a fine clause, and note it: that exemption becomes a CI path filter next week. Q: "What if we all just agree?" A: run the catch-test out loud — which fix does each kept clause catch? If nothing on your list catches B, you are not done. Q: "Does wording matter?" A: substance now, wording when you write the NFR — the Doc list are raw material, not the document. ~1 min to present.</a:t>
             </a:r>
           </a:p>
         </p:txBody>
@@ -1511,7 +1511,7 @@
           <a:lstStyle/>
           <a:p>
             <a:r>
-              <a:t>[CALIBRATED from Lab 1.b, 2026-08-12: agenda held · prompting depth right · checkpoint gates worked · mostly solo, fine · room waits to be told → 4 seed clauses + 10-min derive] Ten minutes, tight — 1.b says this room waits to be told, so drive it: the FACILITATION LADDER, in order, per stalled group: (1) "Seed 2 — keep, tighten, or drop?" (2) "Fix B is green. Would seed 1 alone have caught it?" (3) "Which of your tags could a script actually decide — prove it: what does the script read?" Never state a clause yourself. Watch for the room deciding B is acceptable; that is the interesting case — do NOT tell them. Group B keeps faster tables on the second convention; its output feeds the merge. Point back at the clock slide when a group drifts. ~10 min.</a:t>
+              <a:t>[CALIBRATED from Lab 1.b, 2026-08-12: agenda held · prompting depth right · checkpoint gates worked · mostly solo, fine · room waits to be told → 4 seed clauses + 10-min derive] Ten minutes, silent, individual — mics muted, monitor the Doc as lists appear. 1.b says this cohort waits to be told, so the ladder is delivered as TIMED CHAT NUDGES to everyone, not as visits: at ~3 min, "Seed 2 — keep, tighten, or drop?"; at ~6, "Fix B is green. Would seed 1 alone have caught it?"; at ~8, "Which of your tags could a script actually decide?" Never state a clause. Individuals stuck beyond the nudges get a Slack ping, not a call-out. Watch the Doc for lists where B passes — the interesting case; do NOT flag it yet. Fast finishers: the store boundary, same method, as stretch. ~10 min.</a:t>
             </a:r>
           </a:p>
         </p:txBody>
@@ -1581,7 +1581,7 @@
           <a:lstStyle/>
           <a:p>
             <a:r>
-              <a:t>[CALIBRATED from Lab 1.b, 2026-08-12: agenda held · prompting depth right · checkpoint gates worked · mostly solo, fine · room waits to be told → 4 seed clauses + 10-min derive] MANDATORY: state and write the agreed clauses before advancing — an unresolved discussion is worse than none. Run it as: each group reads its biggest disagreement first (that is why they picked one), THEN the lists. Card contents are illustrative; replace live with what the room produced. If they missed "failed first", ask: "B was green before the fix. Would your rule have caught it?" Apply the tiebreak out loud when groups conflict: the stricter clause wins unless someone can show it false-positives on real code in this repo. COMMON QUESTIONS — Q: "Who owns this agreed list?" A: the room does, as of now — it goes in everyone's NFR; a champion owns keeping it true after today. Q: "Group A and B derived different rules — which is THE standard?" A: both — test discipline and the store boundary are two NFRs; you write up your group's. Q: "Can we change the list later?" A: yes — NFRs revise in place; that is the lifecycle slide made real. ARTIFACT BEAT (30 sec, do not skip): ask "which artifact is this list?" and give ten seconds before answering — someone will say ADR, and that is the productive mistake: it FEELS like a decision, but the quick test says NFR (always-holds + checkable; present tense; revised in place). If adopting the rule ever becomes genuinely contested, THAT argument earns an ADR. And the know-how ("how do I write a failing test first?") is recipe material — a stretch, not today. One derivation, three artifact homes — the slide-6 skill, used on their own work. "The test failed first" is the clause that matters most, and no gate can decide it — that is the finding, and 2.b's opening problem. ~3 min.</a:t>
+              <a:t>[CALIBRATED from Lab 1.b, 2026-08-12: agenda held · prompting depth right · checkpoint gates worked · mostly solo, fine · room waits to be told → 4 seed clauses + 10-min derive] MANDATORY: state and write the agreed clauses before advancing — an unresolved compare is worse than none. Run it as: share the Doc on screen, name the clauses MOST lists agree on (those enter AGREED fast), then ask two or three people to unmute and read their LEAST-SURE clause (that is why they marked one) — divergence is where the standard gets made. Card contents are illustrative; replace live with what the room produced. If they missed "failed first", ask: "B was green before the fix. Would your rule have caught it?" Apply the tiebreak out mic when lists conflict: the stricter clause wins unless someone can show it false-positives on real code in this repo. COMMON QUESTIONS — Q: "Who owns this agreed list?" A: the class does, as of now — it goes in everyone's NFR; a champion owns keeping it true after today. Q: "My list disagrees with AGREED — do I write mine or ours?" A: ours — AGREED is the standard; record your dissent as a dropped clause with a reason, which is exactly how disagreement with a live standard works on a real team. Q: "Can we change the list later?" A: yes — NFRs revise in place; that is the lifecycle slide made real. ARTIFACT BEAT (30 sec, do not skip): ask "which artifact is this list?" and give ten seconds before answering — someone will say ADR, and that is the productive mistake: it FEELS like a decision, but the quick test says NFR (always-holds + checkable; present tense; revised in place). If adopting the rule ever becomes genuinely contested, THAT argument earns an ADR. And the know-how ("how do I write a failing test first?") is recipe material — a stretch, not today. One derivation, three artifact homes — the slide-6 skill, used on their own work. "The test failed first" is the clause that matters most, and no gate can decide it — that is the finding, and 2.b's opening problem. ~3 min.</a:t>
             </a:r>
           </a:p>
         </p:txBody>
@@ -1791,7 +1791,7 @@
           <a:lstStyle/>
           <a:p>
             <a:r>
-              <a:t>[CALIBRATED from Lab 1.b, 2026-08-12: agenda held · prompting depth right · checkpoint gates worked · mostly solo, fine · room waits to be told → 4 seed clauses + 10-min derive] Circulate with one question per group: "how is that checked?" If they cannot answer, the clause is not finished. The skeleton on screen is also in the handout. Reserve the last five minutes for peer review — it is an acceptance criterion and the first thing skipped. COMMON QUESTIONS — Q: "We derived as a group — does everyone write the same NFR?" A: same clauses, YOUR document: your wording, your Checked-by lines, your marks; the peer review is what catches where wording changed the meaning. Q: "What filename?" A: docs/nfr/0002-test-discipline.md (group B: 0002-db-access-boundary.md) — next number, kebab-case, like the ADR. Q: "Do dropped clauses go in?" A: yes, one line each at the bottom with the drop decision and a name — a visibly-considered-and-dropped clause stops the same debate re-running next quarter. Q: "How formal is the wording?" A: NFR-0001's tone: plain sentences, numbered, no legalese — the Checked-by line is where the rigour lives. ~20 min.</a:t>
+              <a:t>[CALIBRATED from Lab 1.b, 2026-08-12: agenda held · prompting depth right · checkpoint gates worked · mostly solo, fine · room waits to be told → 4 seed clauses + 10-min derive] One recurring chat nudge: "how is that clause checked?" If someone cannot answer, the clause is not finished. The skeleton on screen is also in the handout. Reserve the last five minutes for peer review — it is an acceptance criterion and the first thing skipped. COMMON QUESTIONS — Q: "We all start from the same AGREED list — does everyone write the same NFR?" A: same clauses, YOUR document: your wording, your Checked-by lines, your marks, your dropped-clause dissents; the peer review is what catches where wording changed the meaning. Q: "What filename?" A: docs/nfr/0002-test-discipline.md — next number, kebab-case, like the ADR (the store-boundary stretch would be 0003). Q: "Do dropped clauses go in?" A: yes, one line each at the bottom with the drop decision and a name — a visibly-considered-and-dropped clause stops the same debate re-running next quarter. Q: "How formal is the wording?" A: NFR-0001's tone: plain sentences, numbered, no legalese — the Checked-by line is where the rigour lives. ~20 min.</a:t>
             </a:r>
           </a:p>
         </p:txBody>
@@ -1861,7 +1861,7 @@
           <a:lstStyle/>
           <a:p>
             <a:r>
-              <a:t>[CALIBRATED from Lab 1.b, 2026-08-12: agenda held · prompting depth right · checkpoint gates worked · mostly solo, fine · room waits to be told → 4 seed clauses + 10-min derive] Ask one voice per group to unmute and read a fuzzy clause with its recorded decision — two minutes, and it makes the standard real. The common failure here: a "Checked by: code review" line on every clause — that is the human gate as a reflex, not a decision; push once: "could a script check THIS one?" Fast finishers: the half-gate stretch (write the ESLint clause) or the rules-file conversion. ~2 min.</a:t>
+              <a:t>[CALIBRATED from Lab 1.b, 2026-08-12: agenda held · prompting depth right · checkpoint gates worked · mostly solo, fine · room waits to be told → 4 seed clauses + 10-min derive] Ask two or three people to unmute and read a fuzzy clause with its recorded decision — two minutes, and it makes the standard real. The common failure here: a "Checked by: code review" line on every clause — that is the human gate as a reflex, not a decision; push once: "could a script check THIS one?" Fast finishers: the half-gate stretch (write the ESLint clause) or the rules-file conversion. ~2 min.</a:t>
             </a:r>
           </a:p>
         </p:txBody>
@@ -11760,7 +11760,7 @@
                 </a:solidFill>
                 <a:latin typeface="Arial"/>
               </a:rPr>
-              <a:t>The clause list later is group work. Every document today is yours, in your copy.</a:t>
+              <a:t>Everything today is yours, in your copy — including the clause list you derive later.</a:t>
             </a:r>
           </a:p>
         </p:txBody>
@@ -15344,7 +15344,7 @@
                 </a:solidFill>
                 <a:latin typeface="Arial"/>
               </a:rPr>
-              <a:t>0–1</a:t>
+              <a:t>0–4</a:t>
             </a:r>
           </a:p>
         </p:txBody>
@@ -15386,7 +15386,7 @@
                 </a:solidFill>
                 <a:latin typeface="Arial"/>
               </a:rPr>
-              <a:t>Pick who writes</a:t>
+              <a:t>Verdict each seed: keep, tighten, or drop. A clause earns KEEP only if you can name which of A / B / C it catches</a:t>
             </a:r>
           </a:p>
         </p:txBody>
@@ -15428,7 +15428,7 @@
                 </a:solidFill>
                 <a:latin typeface="Arial"/>
               </a:rPr>
-              <a:t>One list everyone can see — talk without writing leaves nothing to merge</a:t>
+              <a:t>Four verdicts, each tagged MECHANICAL or FUZZY</a:t>
             </a:r>
           </a:p>
         </p:txBody>
@@ -15514,7 +15514,7 @@
                 </a:solidFill>
                 <a:latin typeface="Arial"/>
               </a:rPr>
-              <a:t>1–5</a:t>
+              <a:t>4–7</a:t>
             </a:r>
           </a:p>
         </p:txBody>
@@ -15556,7 +15556,7 @@
                 </a:solidFill>
                 <a:latin typeface="Arial"/>
               </a:rPr>
-              <a:t>Verdict each seed: keep, tighten, or drop. A clause earns KEEP only if you can name which of A / B / C it catches</a:t>
+              <a:t>Add your own clauses — what did the seeds miss?</a:t>
             </a:r>
           </a:p>
         </p:txBody>
@@ -15598,7 +15598,7 @@
                 </a:solidFill>
                 <a:latin typeface="Arial"/>
               </a:rPr>
-              <a:t>Four verdicts, each tagged MECHANICAL or FUZZY</a:t>
+              <a:t>One or two more, tagged. More than 6 total means they're too small</a:t>
             </a:r>
           </a:p>
         </p:txBody>
@@ -15684,7 +15684,7 @@
                 </a:solidFill>
                 <a:latin typeface="Arial"/>
               </a:rPr>
-              <a:t>5–8</a:t>
+              <a:t>7–9</a:t>
             </a:r>
           </a:p>
         </p:txBody>
@@ -15726,7 +15726,7 @@
                 </a:solidFill>
                 <a:latin typeface="Arial"/>
               </a:rPr>
-              <a:t>Add your own clauses — what did the seeds miss?</a:t>
+              <a:t>Mark the one clause you're LEAST sure about</a:t>
             </a:r>
           </a:p>
         </p:txBody>
@@ -15768,7 +15768,7 @@
                 </a:solidFill>
                 <a:latin typeface="Arial"/>
               </a:rPr>
-              <a:t>One or two more, tagged. More than 6 total means they're too small</a:t>
+              <a:t>That is what you'll raise at the compare — doubt is the interesting output</a:t>
             </a:r>
           </a:p>
         </p:txBody>
@@ -15854,7 +15854,7 @@
                 </a:solidFill>
                 <a:latin typeface="Arial"/>
               </a:rPr>
-              <a:t>8–10</a:t>
+              <a:t>9–10</a:t>
             </a:r>
           </a:p>
         </p:txBody>
@@ -15896,7 +15896,7 @@
                 </a:solidFill>
                 <a:latin typeface="Arial"/>
               </a:rPr>
-              <a:t>Pick your one biggest disagreement</a:t>
+              <a:t>Paste your list into the shared Doc, under your name</a:t>
             </a:r>
           </a:p>
         </p:txBody>
@@ -15938,7 +15938,7 @@
                 </a:solidFill>
                 <a:latin typeface="Arial"/>
               </a:rPr>
-              <a:t>You'll say it out loud in the merge — disagreement is the interesting output</a:t>
+              <a:t>Everyone's lists, side by side — the raw material for the class standard</a:t>
             </a:r>
           </a:p>
         </p:txBody>
@@ -15980,7 +15980,7 @@
                 </a:solidFill>
                 <a:latin typeface="Arial"/>
               </a:rPr>
-              <a:t>The clause list is the only group output. Everything graded — the NFR you write next — is yours alone, in your own copy, through your own PR. (And: tighten = more checkable, not more strict.)</a:t>
+              <a:t>All of it is yours: this list, and the NFR you write from it — your own copy, your own PR. The class compare that follows is calibration, not a committee. (And: tighten = more checkable, not more strict.)</a:t>
             </a:r>
           </a:p>
         </p:txBody>
@@ -16230,7 +16230,7 @@
                 </a:solidFill>
                 <a:latin typeface="Arial"/>
               </a:rPr>
-              <a:t>Ten minutes, in groups, on the clock you just saw: verdict each seed (keep / tighten / drop), tag it, add your own. These clauses become the Rules section of your NFR.</a:t>
+              <a:t>Ten minutes, on your own, on the clock you just saw: verdict each seed (keep / tighten / drop), tag it, add your own. These clauses become the Rules section of your NFR.</a:t>
             </a:r>
           </a:p>
         </p:txBody>
@@ -16901,7 +16901,7 @@
                 </a:solidFill>
                 <a:latin typeface="Arial"/>
               </a:rPr>
-              <a:t>TWO GROUPS</a:t>
+              <a:t>THEN THE COMPARE</a:t>
             </a:r>
           </a:p>
         </p:txBody>
@@ -16952,7 +16952,7 @@
                 </a:solidFill>
                 <a:latin typeface="Arial"/>
               </a:rPr>
-              <a:t>A: test discipline (these diffs)</a:t>
+              <a:t>Paste your list in the Doc, under your name</a:t>
             </a:r>
           </a:p>
           <a:p>
@@ -16980,7 +16980,7 @@
                 </a:solidFill>
                 <a:latin typeface="Arial"/>
               </a:rPr>
-              <a:t>B: the store boundary (imports of db/store.ts)</a:t>
+              <a:t>The class agrees ONE list from them</a:t>
             </a:r>
           </a:p>
           <a:p>
@@ -17008,7 +17008,7 @@
                 </a:solidFill>
                 <a:latin typeface="Arial"/>
               </a:rPr>
-              <a:t>Same job: clauses, tagged</a:t>
+              <a:t>Stretch: the store boundary, same method</a:t>
             </a:r>
           </a:p>
         </p:txBody>
@@ -17258,7 +17258,7 @@
                 </a:solidFill>
                 <a:latin typeface="Arial"/>
               </a:rPr>
-              <a:t>Written down before anyone moves on. This is the agreed list, not my list.</a:t>
+              <a:t>Your lists, side by side in the Doc — now the class agrees ONE. Written down before anyone moves on.</a:t>
             </a:r>
           </a:p>
         </p:txBody>
@@ -18050,7 +18050,7 @@
                 </a:solidFill>
                 <a:latin typeface="Arial"/>
               </a:rPr>
-              <a:t>Which of the five artifacts is this list? Apply the quick test: must always hold, and you can say how it is checked → an NFR. It feels decision-ish — but it is present-tense law, revised in place. Tiebreak when groups conflict: the stricter clause wins unless someone shows it false-positives on real code here.</a:t>
+              <a:t>Which of the five artifacts is this list? Apply the quick test: must always hold, and you can say how it is checked → an NFR. It feels decision-ish — but it is present-tense law, revised in place. Tiebreak when lists conflict: the stricter clause wins unless someone shows it false-positives on real code here.</a:t>
             </a:r>
           </a:p>
         </p:txBody>

--- a/docs/instructor/lab-2a-writing-the-standards-down.pptx
+++ b/docs/instructor/lab-2a-writing-the-standards-down.pptx
@@ -1651,7 +1651,7 @@
           <a:lstStyle/>
           <a:p>
             <a:r>
-              <a:t>Two minutes, and it is the hinge: written-unchecked, checked, half-checked all live in ONE file the room already trusts. The half-gate case is the stretch item — closing it is an ESLint rule away. This is Appendix C's logging-standards coverage: the convention exists; the class derives what checking it would mean. ~2 min.</a:t>
+              <a:t>THE GOAL OF THIS SLIDE, in one sentence: prove that the MECHANICAL/FUZZY tag they just put on their own clauses is not homework bookkeeping — it is a property every written rule already has, demonstrated in a file they already trust. Same CLAUDE.md, three rules, three enforcement states: the store boundary is WRITTEN and nothing checks it (their morning ADR subject — a rule can be documented and still be only a promise); console.log is CHECKED (lint fails it — the only one of the three that is actually a gate); logger.info with a wrong first arg is HALF-CHECKED — it looks enforced, passes silently, and that false confidence makes the half-gate the most dangerous state of the three, worse than unchecked because nobody is watching a rule they believe a machine watches. The three states are NAMED on the slide — walk them top to bottom, then land the last bullet as the bridge to the write-up: the Checked-by line is where each clause's state gets RECORDED, and 2.b is where the unchecked ones get teeth. If you want a discussion beat, ask "so which of these is a standard?" and answer it: all three (written + agreed) — what differs is only how much of each is backed by a check. FACT-CHECKED against the repo 2026-08-13: the shown call keeps the signature (scope, message, meta) typed correctly, so tsc passes it AND eslint passes it — only the CONVENTION (scope = file basename) is violated, and nothing checks that. Say the strengthened version out loud: TWO machine checkers watch this exact line, and the rule still slips through, because neither was aimed at it. This slide is a taught exhibit, NOT an exercise — do not invite a live paste-test. COMMON QUESTIONS — Q: "I tried a wrong first arg and the editor DID flag it" A: almost certainly the TYPE checker, because the pasted call dropped the message argument — a shape error, not the convention; keep all three args typed right and every checker goes quiet. And that near-miss IS the lesson: an error NEAR a rule reads as enforcement of the rule, which is how half-gates stay invisible. Q: "What is meta?" A: the optional third argument — a plain object of structured context (Record&lt;string, unknown&gt;) that the logger JSON-stringifies onto the log line; the ? means optional, borrowed from TypeScript. VALID (all pass tsc): logger.info('todos.service', 'created', { id }) — object literal in the third slot; logger.info('http', 'GET /api/todos 200', { durationMs }) — the live call in requestLogger.ts; logger.info('index', 'server started') — meta omitted entirely, that is what optional means. INVALID (each verified against tsc 2026-08-13): logger.info('todos.service', { id }) — only two args, so the object sits in the MESSAGE slot, which must be a string (the classic mistake); logger.info('todos.service', 'created', 'id=' + id) — meta must be an object, never a pre-formatted string: put values IN the object; logger.info('todos.service', 'created', id) — a bare value is not a Record: wrap it as { id }. Rule of thumb: two strings, then one object or nothing. Q: "Isn't the scope convention FUZZY, then — nothing checks it?" A: no — unchecked and UNCHECKABLE are different facts. CAN a machine check it? Yes: the linter always knows which file it is in, so a rule comparing the first-arg literal to the file basename is a dumb string comparison — MECHANICAL. DOES anything check it today? No — nobody wrote that rule. Checkable-but-unchecked is exactly what a half-gate is. Contrast: "the test failed before the fix" is UNCHECKABLE from the code — that one is fuzzy. (Full honesty for a sharp room: a variable first arg defeats the literal comparison, so strictly the clause is PARTLY — 2.b names that tier.) Q: "So is the logging rule enforced or not?" A: half — the channel is enforced, the content is not; "enforced" is per-CLAUSE, never per-rule, which is why your NFR marks each clause separately. Q: "Why not just fix the half-gate now?" A: it is an ESLint rule away and makes a fine stretch — but today the point is SEEING the state, not fixing it; you will close a gap like this in 2.b. ~2 min.</a:t>
             </a:r>
           </a:p>
         </p:txBody>
@@ -1931,7 +1931,7 @@
           <a:lstStyle/>
           <a:p>
             <a:r>
-              <a:t>Name the two mechanisms out loud — trigger row vs binding line — and anchor both in 1.a: the trigger row is the lazy pointer they already know; the binding line is a deliberate eager load, kept to one sentence precisely because eager costs every session. The binding line is new vocabulary and it is graded. NFR-0001 has no binding line yet; they are setting the pattern. The smoke test takes 60 seconds: new session, ask the rule, watch whether it reads the doc or guesses. If it guesses, the trigger is phrased as a topic, not a situation — fixable in one edit. ~9 min.</a:t>
+              <a:t>The slide before showed WHAT the two entries are; this one says what each DOES — same rule, referenced twice, two different jobs. Say the mechanics precisely. The BINDING LINE enforces by PRESENCE: it is the rule's one operative sentence living inside CLAUDE.md, so it is in context every session — loaded once with the file, no separate fetch, and above all no DECISION: the trigger row works only if Claude correctly decides the situation applies; the binding line arrives whether or not anything decides anything. SAY THE WORD OUT LOUD BEFORE THE ROOM MISREADS IT: binding as in a binding CONTRACT — the line is the rule, in force — NOT binding as in data-binding; it does not wire anything to anything, and its citation loads nothing. Developers reliably hear the wrong one first. The TRIGGER ROW, by contrast, has two parts and naming them helps: a SITUATION ("when you are fixing a bug") and a POINTER ("read docs/nfr/0002 first") — the pointer gives Claude the ABILITY to load the full doc; the situation says WHEN to use it. (Precision for the sharp student: CLAUDE.md itself IS read at session start — the claim is not "never loaded", it is "never conditional".) Its (NFR-0002) tail is a CITATION, not a loader: it tells Claude and humans where the full law lives, one deliberate hop away. The TRIGGER ROW loads by SITUATION: when the task matches "fixing a bug or adding behaviour", Claude goes and reads the whole NFR — every clause, Checked-by line, dropped clause. TWO PATHS to the full document, and only one is designed: (1) the trigger row — the situation matches, the doc is read; this is the reliable path. (2) following the citation — Claude (or a person) mid-task decides it needs more than the headline and chases NFR-0002; possible because the citation exists, but voluntary — nothing forces it. Delete the trigger row and path 2 still exists, but now you are relying on Claude spontaneously deciding to look things up — hope-based governance, the exact thing this lab replaces. Anchor in 1.a: the trigger row is the lazy pointer they already know; the binding line is a deliberate one-line eager load, kept to one sentence precisely because eager space is paid every session. Kill each one mentally to prove both are needed: no binding line, and the always-applies rule hangs on Claude deciding to fetch; no trigger row, and the details (how each clause is checked, the exceptions) are unreachable by situation. The binding line is new vocabulary and it is graded. WHEN IS A BINDING LINE NEEDED — give them the test, then the repo's own contrast: ask "in what situation does this rule apply?" If you can name one narrower than ANY CHANGE, the trigger row is enough — that is why NFR-0001 needs NO binding line: "calling an external API" is a nameable situation, so its trigger row suffices. Test discipline applies to every change — no situation could trigger the fetch reliably — so it is the first rule in this repo that EARNS the eager line. Expect binding lines to stay RARE: a CLAUDE.md full of them is just a second copy of every document — one or two in a healthy file. COMMON QUESTIONS — Q: "Why not just make the binding line say READ docs/nfr/0002 before any change?" A: three reasons. One: that converts a one-line cost into a full-document fetch on every session, to retrieve a rule whose operative sentence fits in one line. Two: "always read X first" is the weakest kind of instruction — under pressure it gets skipped, while a rule stated in place is simply THERE; the sign on the wall works because it IS the rule, not directions to the rulebook. Three: the binding line already cites NFR-0002, so the full law — all clauses, Checked-by lines, dropped clauses — is one hop away when nuance is needed. Q: "Then why not paste the whole NFR into CLAUDE.md?" A: one home per fact — a copy drifts from the doc and then nobody knows which is authoritative; and CLAUDE.md is a paid-every-session index, not a library. Q: "The trigger row already says fixing-a-bug -&gt; read the NFR — is the binding line not redundant?" A: the trigger is a fetch DECISION Claude makes each time, and a rule that applies to every change would need that decision made right every time; the binding line is deterministic presence. Redundant on purpose — like the deny rule and the hook next week. Q: "Why doesn't the binding line load the NFR when I am fixing a bug?" A: nothing in CLAUDE.md EXECUTES — every entry is a sentence Claude obeys, and each does exactly what its text says: "Read first: docs/nfr/0002" instructs a read, "ships with a test" instructs a test. The load while bug-fixing comes from the trigger row, the only sentence that says READ. Q: "Is the trigger row enforced?" A: no — all of this wiring is layer 1, instruction; nothing verifies the read happened, and the smoke test is a manual probe, not a gate. Next week does NOT change that: 2.b enforces the OUTCOME (a test in the diff, via hook + CI gate), never the reading — you cannot usefully gate "did the model read the doc", you gate the consequence, and once the outcome is gated the read matters less. Layer 1 informs; layers 2–4 enforce. The smoke test takes 60 seconds: new session, ask the rule, watch whether it reads the doc or guesses. If it guesses, the trigger is phrased as a topic, not a situation — fixable in one edit. ~9 min.</a:t>
             </a:r>
           </a:p>
         </p:txBody>
@@ -18300,7 +18300,7 @@
                 </a:solidFill>
                 <a:latin typeface="Arial"/>
               </a:rPr>
-              <a:t>A rule with half a gate. Your NFR clauses will have the same three states — that is what the tag is for.</a:t>
+              <a:t>The lesson: WRITTEN and ENFORCED are different properties of a rule. Three rules from the CLAUDE.md you already trust — one in each state.</a:t>
             </a:r>
           </a:p>
         </p:txBody>
@@ -18378,7 +18378,7 @@
                 </a:solidFill>
                 <a:latin typeface="Arial"/>
               </a:rPr>
-              <a:t>ONE CLAUDE.MD, THREE RULES</a:t>
+              <a:t>ONE CLAUDE.MD, THREE RULES — ONE RULE IN EACH STATE</a:t>
             </a:r>
           </a:p>
         </p:txBody>
@@ -18429,7 +18429,7 @@
                 </a:solidFill>
                 <a:latin typeface="Arial"/>
               </a:rPr>
-              <a:t>Store boundary: written, NOTHING checks it.</a:t>
+              <a:t>WRITTEN ONLY — the store boundary: nothing checks it. A promise.</a:t>
             </a:r>
           </a:p>
           <a:p>
@@ -18457,7 +18457,7 @@
                 </a:solidFill>
                 <a:latin typeface="Arial"/>
               </a:rPr>
-              <a:t>console.log in server/src: lint FAILS it.</a:t>
+              <a:t>CHECKED — console.log: lint fails it. A gate.</a:t>
             </a:r>
           </a:p>
           <a:p>
@@ -18485,7 +18485,7 @@
                 </a:solidFill>
                 <a:latin typeface="Arial"/>
               </a:rPr>
-              <a:t>logger.info with a wrong first arg: passes SILENTLY.</a:t>
+              <a:t>HALF-CHECKED — logger.info with a message where the file basename belongs: types pass, lint passes. The dangerous one — it LOOKS enforced.</a:t>
             </a:r>
           </a:p>
           <a:p>
@@ -18513,7 +18513,7 @@
                 </a:solidFill>
                 <a:latin typeface="Arial"/>
               </a:rPr>
-              <a:t>Which of these is a standard? Why?</a:t>
+              <a:t>Every clause you just tagged sits in one of these states. The Checked-by line in your NFR records which.</a:t>
             </a:r>
           </a:p>
         </p:txBody>
@@ -18640,7 +18640,7 @@
                 </a:solidFill>
                 <a:latin typeface="Arial"/>
               </a:rPr>
-              <a:t>SERVER/SRC — TRY IT</a:t>
+              <a:t>THE EVIDENCE — EVERY CHECKER'S VERDICT, PER CALL</a:t>
             </a:r>
           </a:p>
         </p:txBody>
@@ -18777,7 +18777,7 @@
                 </a:solidFill>
                 <a:latin typeface="Consolas"/>
               </a:rPr>
-              <a:t>  // -&gt; lint error. CAUGHT.</a:t>
+              <a:t>// LINT ERROR (no-console).</a:t>
             </a:r>
           </a:p>
           <a:p>
@@ -18796,6 +18796,25 @@
                 </a:solidFill>
                 <a:latin typeface="Consolas"/>
               </a:rPr>
+              <a:t>// The channel is CHECKED.</a:t>
+            </a:r>
+          </a:p>
+          <a:p>
+            <a:pPr algn="l">
+              <a:lnSpc>
+                <a:spcPct val="114000"/>
+              </a:lnSpc>
+              <a:spcAft>
+                <a:spcPts val="0"/>
+              </a:spcAft>
+            </a:pPr>
+            <a:r>
+              <a:rPr sz="900" b="0">
+                <a:solidFill>
+                  <a:srgbClr val="434343"/>
+                </a:solidFill>
+                <a:latin typeface="Consolas"/>
+              </a:rPr>
               <a:t/>
             </a:r>
           </a:p>
@@ -18834,7 +18853,7 @@
                 </a:solidFill>
                 <a:latin typeface="Consolas"/>
               </a:rPr>
-              <a:t>  { id })</a:t>
+              <a:t>  'created', { id })</a:t>
             </a:r>
           </a:p>
           <a:p>
@@ -18853,7 +18872,7 @@
                 </a:solidFill>
                 <a:latin typeface="Consolas"/>
               </a:rPr>
-              <a:t>  // wrong first arg -&gt; passes.</a:t>
+              <a:t>// tsc: clean. eslint: clean.</a:t>
             </a:r>
           </a:p>
           <a:p>
@@ -18872,7 +18891,26 @@
                 </a:solidFill>
                 <a:latin typeface="Consolas"/>
               </a:rPr>
-              <a:t>  // HALF a gate.</a:t>
+              <a:t>// The scope convention is</a:t>
+            </a:r>
+          </a:p>
+          <a:p>
+            <a:pPr algn="l">
+              <a:lnSpc>
+                <a:spcPct val="114000"/>
+              </a:lnSpc>
+              <a:spcAft>
+                <a:spcPts val="0"/>
+              </a:spcAft>
+            </a:pPr>
+            <a:r>
+              <a:rPr sz="900" b="0">
+                <a:solidFill>
+                  <a:srgbClr val="434343"/>
+                </a:solidFill>
+                <a:latin typeface="Consolas"/>
+              </a:rPr>
+              <a:t>// checked by NOTHING.</a:t>
             </a:r>
           </a:p>
         </p:txBody>
@@ -21538,7 +21576,7 @@
                 </a:solidFill>
                 <a:latin typeface="Arial"/>
               </a:rPr>
-              <a:t>A document nothing points at is a document nobody reads</a:t>
+              <a:t>A doc nothing points at is a doc nobody reads</a:t>
             </a:r>
           </a:p>
         </p:txBody>
@@ -21658,7 +21696,7 @@
                 </a:solidFill>
                 <a:latin typeface="Arial"/>
               </a:rPr>
-              <a:t>TWO KINDS OF WIRING</a:t>
+              <a:t>THE SAME RULE, WIRED TWICE — TWO DIFFERENT JOBS</a:t>
             </a:r>
           </a:p>
         </p:txBody>
@@ -21709,7 +21747,7 @@
                 </a:solidFill>
                 <a:latin typeface="Arial"/>
               </a:rPr>
-              <a:t>A TRIGGER ROW per doc — fetches the full doc when the situation applies.</a:t>
+              <a:t>BINDING LINE — enforces by PRESENCE: it IS the rule's headline sentence, riding in with CLAUDE.md every session. No fetch DECISION.</a:t>
             </a:r>
           </a:p>
           <a:p>
@@ -21737,7 +21775,7 @@
                 </a:solidFill>
                 <a:latin typeface="Arial"/>
               </a:rPr>
-              <a:t>A BINDING LINE for the NFR — one line, always in force, never fetched.</a:t>
+              <a:t>TRIGGER ROW — a SITUATION ("when you are…") plus a POINTER ("read first"): the situation says when, the pointer loads the FULL doc.</a:t>
             </a:r>
           </a:p>
           <a:p>
@@ -21765,7 +21803,7 @@
                 </a:solidFill>
                 <a:latin typeface="Arial"/>
               </a:rPr>
-              <a:t>Same pair as 1.a: trigger row = the lazy pointer; binding line = a one-line EAGER load.</a:t>
+              <a:t>When does a rule EARN a binding line? Name its situation. Specific ("calling an external API") — trigger row only. "Every change" — binding line.</a:t>
             </a:r>
           </a:p>
           <a:p>
@@ -21793,35 +21831,7 @@
                 </a:solidFill>
                 <a:latin typeface="Arial"/>
               </a:rPr>
-              <a:t>The doc is the law; the binding line is the sign on the wall.</a:t>
-            </a:r>
-          </a:p>
-          <a:p>
-            <a:pPr algn="l">
-              <a:lnSpc>
-                <a:spcPct val="120000"/>
-              </a:lnSpc>
-              <a:spcAft>
-                <a:spcPts val="800"/>
-              </a:spcAft>
-            </a:pPr>
-            <a:r>
-              <a:rPr sz="1100" b="1">
-                <a:solidFill>
-                  <a:srgbClr val="A9B7F7"/>
-                </a:solidFill>
-                <a:latin typeface="Arial"/>
-              </a:rPr>
-              <a:t>•  </a:t>
-            </a:r>
-            <a:r>
-              <a:rPr sz="1100" b="0">
-                <a:solidFill>
-                  <a:srgbClr val="434343"/>
-                </a:solidFill>
-                <a:latin typeface="Arial"/>
-              </a:rPr>
-              <a:t>Then smoke-test in a FRESH session.</a:t>
+              <a:t>The (NFR-0002) tag is a citation, not a loader.</a:t>
             </a:r>
           </a:p>
         </p:txBody>

--- a/docs/instructor/lab-2a-writing-the-standards-down.pptx
+++ b/docs/instructor/lab-2a-writing-the-standards-down.pptx
@@ -35,6 +35,7 @@
     <p:sldId id="283" r:id="rId35"/>
     <p:sldId id="284" r:id="rId36"/>
     <p:sldId id="285" r:id="rId37"/>
+    <p:sldId id="286" r:id="rId38"/>
   </p:sldIdLst>
   <p:sldSz cx="9144000" cy="5143500" type="screen4x3"/>
   <p:notesSz cx="6858000" cy="9144000"/>
@@ -531,7 +532,13 @@
           <a:lstStyle/>
           <a:p>
             <a:r>
-              <a:t>Welcome to Lab 2.a. Two hours, mostly hands-on. The challenge in one breath: this repo has a real, load-bearing rule that nothing explains and nothing checks — you will document the why as an ADR, derive a rule from last week's real fixes and write it as an NFR, and wire both into CLAUDE.md so Claude actually reads them. ~1 min.</a:t>
+              <a:t>Welcome to Lab 2.a. Two hours, mostly hands-on. The challenge in one breath: this repo has a real, load-bearing rule that nothing explains and nothing checks — you will document the why as an ADR, derive a rule from last week's real fixes and write it as an NFR, and wire both into CLAUDE.md so Claude actually reads them.</a:t>
+            </a:r>
+          </a:p>
+          <a:p/>
+          <a:p>
+            <a:r>
+              <a:t>~1 min.</a:t>
             </a:r>
           </a:p>
         </p:txBody>
@@ -601,7 +608,13 @@
           <a:lstStyle/>
           <a:p>
             <a:r>
-              <a:t>Cite the finding as a finding: published field experience says teams stop writing ADRs because the operational questions were never answered. Ask which of these five triggers they could answer for their own repos today — usually none. Champions co-lead the standards work from here on and the EM reviews the output — name the confirmed co-leads here (see the engagement plan; do not name anyone in shared material), and make sure the room knows a review is coming. ~4 min.</a:t>
+              <a:t>Cite the finding as a finding: published field experience says teams stop writing ADRs because the operational questions were never answered. Ask which of these five triggers they could answer for their own repos today — usually none. Champions co-lead the standards work from here on and the EM reviews the output — name the confirmed co-leads here (see the engagement plan; do not name anyone in shared material), and make sure the room knows a review is coming.</a:t>
+            </a:r>
+          </a:p>
+          <a:p/>
+          <a:p>
+            <a:r>
+              <a:t>~4 min.</a:t>
             </a:r>
           </a:p>
         </p:txBody>
@@ -671,7 +684,13 @@
           <a:lstStyle/>
           <a:p>
             <a:r>
-              <a:t>Demonstrate the shape: the second prompt deliberately ends "leave Decision as a question for me to answer" — that clause is the difference between drafting and delegating. All five starters are in the handout's prompt table; these two are quoted from it verbatim. ~4 min.</a:t>
+              <a:t>Demonstrate the shape: the second prompt deliberately ends "leave Decision as a question for me to answer" — that clause is the difference between drafting and delegating. All five starters are in the handout's prompt table; these two are quoted from it verbatim.</a:t>
+            </a:r>
+          </a:p>
+          <a:p/>
+          <a:p>
+            <a:r>
+              <a:t>~4 min.</a:t>
             </a:r>
           </a:p>
         </p:txBody>
@@ -741,7 +760,13 @@
           <a:lstStyle/>
           <a:p>
             <a:r>
-              <a:t>The incident-citing pattern is the most transferable thing in this block. Give the shape: "Rule: never X. Why: on &lt;date&gt; we did X and &lt;consequence&gt;." It is also the answer to the yes-man complaint from their interviews — rules with reasons survive pushback from a persuasive agent. ~2 min.</a:t>
+              <a:t>The incident-citing pattern is the most transferable thing in this block. Give the shape: "Rule: never X. Why: on &lt;date&gt; we did X and &lt;consequence&gt;." It is also the answer to the yes-man complaint from their interviews — rules with reasons survive pushback from a persuasive agent.</a:t>
+            </a:r>
+          </a:p>
+          <a:p/>
+          <a:p>
+            <a:r>
+              <a:t>~2 min.</a:t>
             </a:r>
           </a:p>
         </p:txBody>
@@ -881,7 +906,52 @@
           <a:lstStyle/>
           <a:p>
             <a:r>
-              <a:t>Show the actual directories, not the slide. Grep for imports of store.ts and show the boundary really holds. The "nothing checks it" line plants 2.b — don't explain it yet. COMMON QUESTIONS here — Q: "Who decided this, then?" A: whoever built the repo; the ADR records the reasoning that decision implies — and if we get it slightly wrong, a PR fixes a document, which beats the nothing we have now. Q: "Is a retroactive ADR cheating?" A: no — most real ADR practices START by back-filling the 3–5 decisions newcomers always ask about; the alternative is oral history. Q: "Why not just add a comment in the code?" A: comments explain a line; this decision spans four directories — it needs a home that isn't inside any one of them. ~3 min.</a:t>
+              <a:t>Show the actual directories, not the slide. Grep for imports of store.ts and show the boundary really holds. The "nothing checks it" line plants 2.b — don't explain it yet.</a:t>
+            </a:r>
+          </a:p>
+          <a:p/>
+          <a:p>
+            <a:r>
+              <a:t>COMMON QUESTIONS here —</a:t>
+            </a:r>
+          </a:p>
+          <a:p/>
+          <a:p>
+            <a:r>
+              <a:t>Q: "Who decided this, then?"</a:t>
+            </a:r>
+          </a:p>
+          <a:p>
+            <a:r>
+              <a:t>A: whoever built the repo; the ADR records the reasoning that decision implies — and if we get it slightly wrong, a PR fixes a document, which beats the nothing we have now.</a:t>
+            </a:r>
+          </a:p>
+          <a:p/>
+          <a:p>
+            <a:r>
+              <a:t>Q: "Is a retroactive ADR cheating?"</a:t>
+            </a:r>
+          </a:p>
+          <a:p>
+            <a:r>
+              <a:t>A: no — most real ADR practices START by back-filling the 3–5 decisions newcomers always ask about; the alternative is oral history.</a:t>
+            </a:r>
+          </a:p>
+          <a:p/>
+          <a:p>
+            <a:r>
+              <a:t>Q: "Why not just add a comment in the code?"</a:t>
+            </a:r>
+          </a:p>
+          <a:p>
+            <a:r>
+              <a:t>A: comments explain a line; this decision spans four directories — it needs a home that isn't inside any one of them.</a:t>
+            </a:r>
+          </a:p>
+          <a:p/>
+          <a:p>
+            <a:r>
+              <a:t>~3 min.</a:t>
             </a:r>
           </a:p>
         </p:txBody>
@@ -951,7 +1021,63 @@
           <a:lstStyle/>
           <a:p>
             <a:r>
-              <a:t>Run the demo AGAINST this slide — point at the step number as you go, so anyone who looks away can rejoin. COMMON QUESTIONS — Q: "What filename/number?" A: next number in docs/adr/, kebab-case: 0002-repository-only-store-access.md; the number is an identity, never reused, even if an ADR is later superseded. Q: "What if Claude's evidence is wrong at step 3?" A: correct it in conversation and re-ask — and say out loud that this is why step 3 exists; a wrong Context poisons everything after it — and there IS a real catch planted in this repo: index.ts imports ensureDb from the store (boot, not data access), which Claude's tidy summary usually misses; the walkthrough doc works it. Tell the room the walkthrough exists so nobody transcribes the demo. Q: "How long should the ADR be?" A: template-length — Context 3–6 sentences, Decision ONE, a handful of consequences; if it sprawls you are writing documentation, not a decision. Q: "Can I just write it by hand, no Claude?" A: absolutely — the artifact is graded, not the tooling; the prompts exist because evidence-gathering across four directories is the part Claude is genuinely good at. ~4 min.</a:t>
+              <a:t>Run the demo AGAINST this slide — point at the step number as you go, so anyone who looks away can rejoin.</a:t>
+            </a:r>
+          </a:p>
+          <a:p/>
+          <a:p>
+            <a:r>
+              <a:t>COMMON QUESTIONS</a:t>
+            </a:r>
+          </a:p>
+          <a:p/>
+          <a:p>
+            <a:r>
+              <a:t>Q: "What filename/number?"</a:t>
+            </a:r>
+          </a:p>
+          <a:p>
+            <a:r>
+              <a:t>A: next number in docs/adr/, kebab-case: 0002-repository-only-store-access.md; the number is an identity, never reused, even if an ADR is later superseded.</a:t>
+            </a:r>
+          </a:p>
+          <a:p/>
+          <a:p>
+            <a:r>
+              <a:t>Q: "What if Claude's evidence is wrong at step 3?"</a:t>
+            </a:r>
+          </a:p>
+          <a:p>
+            <a:r>
+              <a:t>A: correct it in conversation and re-ask — and say out loud that this is why step 3 exists; a wrong Context poisons everything after it — and there IS a real catch planted in this repo: index.ts imports ensureDb from the store (boot, not data access), which Claude's tidy summary usually misses; the walkthrough doc works it. Tell the room the walkthrough exists so nobody transcribes the demo.</a:t>
+            </a:r>
+          </a:p>
+          <a:p/>
+          <a:p>
+            <a:r>
+              <a:t>Q: "How long should the ADR be?"</a:t>
+            </a:r>
+          </a:p>
+          <a:p>
+            <a:r>
+              <a:t>A: template-length — Context 3–6 sentences, Decision ONE, a handful of consequences; if it sprawls you are writing documentation, not a decision.</a:t>
+            </a:r>
+          </a:p>
+          <a:p/>
+          <a:p>
+            <a:r>
+              <a:t>Q: "Can I just write it by hand, no Claude?"</a:t>
+            </a:r>
+          </a:p>
+          <a:p>
+            <a:r>
+              <a:t>A: absolutely — the artifact is graded, not the tooling; the prompts exist because evidence-gathering across four directories is the part Claude is genuinely good at.</a:t>
+            </a:r>
+          </a:p>
+          <a:p/>
+          <a:p>
+            <a:r>
+              <a:t>~4 min.</a:t>
             </a:r>
           </a:p>
         </p:txBody>
@@ -1021,7 +1147,63 @@
           <a:lstStyle/>
           <a:p>
             <a:r>
-              <a:t>Narrate the wrong turns — if Claude writes a consequence that is really a benefit in disguise ("Bad: developers must learn the pattern" is really an upside wearing a frown), say so and fix it live. The honest cost is what makes an ADR credible; a document with only upsides is marketing. The shape matches the shipped template exactly: metadata bullet block, then THREE sections. COMMON QUESTIONS — Q: "What is the difference between Context and Decision content?" A: Context describes the situation and forces, no verbs of choosing; the Decision is one active-voice sentence; if your Context contains "we decided", move that sentence down. Q: "What counts as an honest cost?" A: something a real person could complain about on a real day — the extra hop for simple reads, one more file per resource; test: would a sceptic nod? Q: "What goes in Deciders for a training repo?" A: your name today; in real life, the people who MADE the call — which is rarely the person writing the record. Q: "Claude wrote a different Decision than yours." A: fine, if the substance matches; the wording must be yours — rewrite it in your own words as the test that you own it. ~5 min.</a:t>
+              <a:t>Narrate the wrong turns — if Claude writes a consequence that is really a benefit in disguise ("Bad: developers must learn the pattern" is really an upside wearing a frown), say so and fix it live. The honest cost is what makes an ADR credible; a document with only upsides is marketing. The shape matches the shipped template exactly: metadata bullet block, then THREE sections.</a:t>
+            </a:r>
+          </a:p>
+          <a:p/>
+          <a:p>
+            <a:r>
+              <a:t>COMMON QUESTIONS</a:t>
+            </a:r>
+          </a:p>
+          <a:p/>
+          <a:p>
+            <a:r>
+              <a:t>Q: "What is the difference between Context and Decision content?"</a:t>
+            </a:r>
+          </a:p>
+          <a:p>
+            <a:r>
+              <a:t>A: Context describes the situation and forces, no verbs of choosing; the Decision is one active-voice sentence; if your Context contains "we decided", move that sentence down.</a:t>
+            </a:r>
+          </a:p>
+          <a:p/>
+          <a:p>
+            <a:r>
+              <a:t>Q: "What counts as an honest cost?"</a:t>
+            </a:r>
+          </a:p>
+          <a:p>
+            <a:r>
+              <a:t>A: something a real person could complain about on a real day — the extra hop for simple reads, one more file per resource; test: would a sceptic nod?</a:t>
+            </a:r>
+          </a:p>
+          <a:p/>
+          <a:p>
+            <a:r>
+              <a:t>Q: "What goes in Deciders for a training repo?"</a:t>
+            </a:r>
+          </a:p>
+          <a:p>
+            <a:r>
+              <a:t>A: your name today; in real life, the people who MADE the call — which is rarely the person writing the record.</a:t>
+            </a:r>
+          </a:p>
+          <a:p/>
+          <a:p>
+            <a:r>
+              <a:t>Q: "Claude wrote a different Decision than yours."</a:t>
+            </a:r>
+          </a:p>
+          <a:p>
+            <a:r>
+              <a:t>A: fine, if the substance matches; the wording must be yours — rewrite it in your own words as the test that you own it.</a:t>
+            </a:r>
+          </a:p>
+          <a:p/>
+          <a:p>
+            <a:r>
+              <a:t>~5 min.</a:t>
             </a:r>
           </a:p>
         </p:txBody>
@@ -1091,7 +1273,69 @@
           <a:lstStyle/>
           <a:p>
             <a:r>
-              <a:t>[CALIBRATED from Lab 1.b, 2026-08-12: agenda held · prompting depth right · checkpoint gates worked · mostly solo, fine · room waits to be told → 4 seed clauses + 10-min derive] This is the follow-along increment — everyone in the same state before the checkpoint. If anyone skipped the handout prep, now is when it bites: branch `feat/governance`, docs/labs pulled. Remote circulation: one chat nudge at ~5 min ("stuck on Context? Slack me"); the common stall is over-polishing Context. Ten minutes, hard stop. Fast finishers: point at the stretch — derive the store-boundary clause list early, or review a neighbour's draft Decision. COMMON QUESTIONS — Q: "Same subject as yours — is that not just copying?" A: the MOTION is the point: your prompts, your edit, your Decision sentence, your cost; next week the subject is one nobody has modelled. Q: "What if I disagree with the repository pattern?" A: perfect — record it anyway (Status: Accepted; it IS this repo's reality) and put your objection in Consequences as a cost; recording is not endorsing, and in real life your objection becomes a superseding ADR proposal. Q: "Commit now or at the end?" A: commit to feat/governance now — small commits, one PR at the end of the block. Q: "My ADR came out nearly identical to the demo." A: expected on a shared subject; the checkpoint checks the metadata block, three sections, and a real cost — not originality. ~11 min.</a:t>
+              <a:t>[CALIBRATED from Lab 1.b, 2026-08-12: agenda held · prompting depth right · checkpoint gates worked · mostly solo, fine · room waits to be told → 4 seed clauses + 10-min derive]</a:t>
+            </a:r>
+          </a:p>
+          <a:p/>
+          <a:p>
+            <a:r>
+              <a:t>This is the follow-along increment — everyone in the same state before the checkpoint. If anyone skipped the handout prep, now is when it bites: branch `feat/governance`, docs/labs pulled. Remote circulation: one chat nudge at ~5 min ("stuck on Context? Slack me"); the common stall is over-polishing Context. Ten minutes, hard stop. Fast finishers: point at the stretch — derive the store-boundary clause list early, or swap draft Decisions with another fast finisher over Slack.</a:t>
+            </a:r>
+          </a:p>
+          <a:p/>
+          <a:p>
+            <a:r>
+              <a:t>COMMON QUESTIONS</a:t>
+            </a:r>
+          </a:p>
+          <a:p/>
+          <a:p>
+            <a:r>
+              <a:t>Q: "Same subject as yours — is that not just copying?"</a:t>
+            </a:r>
+          </a:p>
+          <a:p>
+            <a:r>
+              <a:t>A: the MOTION is the point: your prompts, your edit, your Decision sentence, your cost; next week the subject is one nobody has modelled.</a:t>
+            </a:r>
+          </a:p>
+          <a:p/>
+          <a:p>
+            <a:r>
+              <a:t>Q: "What if I disagree with the repository pattern?"</a:t>
+            </a:r>
+          </a:p>
+          <a:p>
+            <a:r>
+              <a:t>A: perfect — record it anyway (Status: Accepted; it IS this repo's reality) and put your objection in Consequences as a cost; recording is not endorsing, and in real life your objection becomes a superseding ADR proposal.</a:t>
+            </a:r>
+          </a:p>
+          <a:p/>
+          <a:p>
+            <a:r>
+              <a:t>Q: "Commit now or at the end?"</a:t>
+            </a:r>
+          </a:p>
+          <a:p>
+            <a:r>
+              <a:t>A: commit to feat/governance now — small commits, one PR at the end of the block.</a:t>
+            </a:r>
+          </a:p>
+          <a:p/>
+          <a:p>
+            <a:r>
+              <a:t>Q: "My ADR came out nearly identical to the demo."</a:t>
+            </a:r>
+          </a:p>
+          <a:p>
+            <a:r>
+              <a:t>A: expected on a shared subject; the checkpoint checks the metadata block, three sections, and a real cost — not originality.</a:t>
+            </a:r>
+          </a:p>
+          <a:p/>
+          <a:p>
+            <a:r>
+              <a:t>~11 min.</a:t>
             </a:r>
           </a:p>
         </p:txBody>
@@ -1161,7 +1405,19 @@
           <a:lstStyle/>
           <a:p>
             <a:r>
-              <a:t>[CALIBRATED from Lab 1.b, 2026-08-12: agenda held · prompting depth right · checkpoint gates worked · mostly solo, fine · room waits to be told → 4 seed clauses + 10-min derive] Chat is the room-walk: Decision sentences land where you can read them, and a missing name is your signal (Slack them, not the whole call). If more than two people are stuck, the cause is usually prompt shape — show yours again. Fast finishers go to the stretch list (handout): the store-boundary clauses or a peer review. ~3 min.</a:t>
+              <a:t>[CALIBRATED from Lab 1.b, 2026-08-12: agenda held · prompting depth right · checkpoint gates worked · mostly solo, fine · room waits to be told → 4 seed clauses + 10-min derive]</a:t>
+            </a:r>
+          </a:p>
+          <a:p/>
+          <a:p>
+            <a:r>
+              <a:t>Chat is the room-walk: Decision sentences land where you can read them, and a missing name is your signal (Slack them, not the whole call). If more than two people are stuck, the cause is usually prompt shape — show yours again. Fast finishers go to the stretch list (handout): the store-boundary clauses or a peer review.</a:t>
+            </a:r>
+          </a:p>
+          <a:p/>
+          <a:p>
+            <a:r>
+              <a:t>~3 min.</a:t>
             </a:r>
           </a:p>
         </p:txBody>
@@ -1231,7 +1487,13 @@
           <a:lstStyle/>
           <a:p>
             <a:r>
-              <a:t>[CALIBRATED from Lab 1.b, 2026-08-12: agenda held · prompting depth right · checkpoint gates worked · mostly solo, fine · room waits to be told → 4 seed clauses + 10-min derive] Scaffolding drops here — from following along to deciding. Announce the mode change explicitly; it should not be discovered. Say what the next 40 minutes look like in one breath: read three fixes (4 min, silent) -&gt; ON YOUR OWN, turn four seed clauses into your rule (10 min, structured — the clock slide gives the shape) -&gt; we compare lists and agree one as a class (4 min) -&gt; each of you writes it up as YOUR OWN NFR (20 min). Individual by design — this course must also work self-guided; the class compare is calibration, not committee work. Full teaching guide for this block — run sheet, scripts, expected-clause bank, recoveries: docs/instructor/lab-2a-derive-teachers-guide.md.</a:t>
+              <a:t>[CALIBRATED from Lab 1.b, 2026-08-12: agenda held · prompting depth right · checkpoint gates worked · mostly solo, fine · room waits to be told → 4 seed clauses + 10-min derive]</a:t>
+            </a:r>
+          </a:p>
+          <a:p/>
+          <a:p>
+            <a:r>
+              <a:t>Scaffolding drops here — from following along to deciding. Announce the mode change explicitly; it should not be discovered. Say what the next 40 minutes look like in one breath: read three fixes (4 min, silent) -&gt; ON YOUR OWN, turn four seed clauses into your rule (10 min, structured — the clock slide gives the shape) -&gt; we compare lists and agree one as a class (4 min) -&gt; each of you writes it up as YOUR OWN NFR (20 min). Individual by design — this course must also work self-guided; the class compare is calibration, not committee work. Full teaching guide for this block — run sheet, scripts, expected-clause bank, recoveries: docs/instructor/lab-2a-derive-teachers-guide.md.</a:t>
             </a:r>
           </a:p>
         </p:txBody>
@@ -1301,7 +1563,19 @@
           <a:lstStyle/>
           <a:p>
             <a:r>
-              <a:t>[CALIBRATED from Lab 1.b, 2026-08-12: agenda held · prompting depth right · checkpoint gates worked · mostly solo, fine · room waits to be told → 4 seed clauses + 10-min derive] The blocks sum to 120 — keep yourself honest on them. No setup block: everyone arrives ready per the handout (branch created, docs/labs pulled, npm test green) — verify in chat ("type READY if npm test is green on your branch"), and route any exception to Slack during the Why slide rather than stopping the call. Set expectations: this block is less typing than 1.b and more deciding. Two unusual asks today: read code cold and write a rule from it, and mark which parts of your own rule a machine could not check. Also say once: how you're assessed is on the handout — same five-dimension rubric as Lab 1, counts toward Agentic Developer. ~2 min.</a:t>
+              <a:t>[CALIBRATED from Lab 1.b, 2026-08-12: agenda held · prompting depth right · checkpoint gates worked · mostly solo, fine · room waits to be told → 4 seed clauses + 10-min derive]</a:t>
+            </a:r>
+          </a:p>
+          <a:p/>
+          <a:p>
+            <a:r>
+              <a:t>The blocks sum to 120 — keep yourself honest on them. No setup block: everyone arrives ready per the handout (branch created, docs/labs pulled, npm test green) — verify in chat ("type READY if npm test is green on your branch"), and route any exception to Slack during the Why slide rather than stopping the call. Set expectations: this block is less typing than 1.b and more deciding. Two unusual asks today: read code cold and write a rule from it, and mark which parts of your own rule a machine could not check. Also say once: how you're assessed is on the handout — same five-dimension rubric as Lab 1, counts toward Agentic Developer.</a:t>
+            </a:r>
+          </a:p>
+          <a:p/>
+          <a:p>
+            <a:r>
+              <a:t>~2 min.</a:t>
             </a:r>
           </a:p>
         </p:txBody>
@@ -1371,7 +1645,59 @@
           <a:lstStyle/>
           <a:p>
             <a:r>
-              <a:t>[CALIBRATED from Lab 1.b, 2026-08-12: agenda held · prompting depth right · checkpoint gates worked · mostly solo, fine · room waits to be told → 4 seed clauses + 10-min derive] STIMULUS (settled 2026-08-12): all three are AUTHORED scenarios — nothing on screen is anyone's real diff, because the cohort's own 1.b PRs were all done properly. Say that as CREDIT, out loud: fix C is exactly what this room did. Then frame A and B as what happens on real teams on busy days — the situations are on the slide now. Give the two reading questions, then stop talking; the silence is deliberate. COMMON QUESTIONS — Q: "Are these real?" A: authored for this exercise; C mirrors your own PRs. Q: "How does B happen if nobody is careless?" A: one mechanism — the test was written AFTER the fix and never run against the broken code; variants: weak assertions, testing the mock, an agent characterizing already-fixed code. Recall 1.b's fixture trap (the Jan-2026 completed todo): a stats test written without completing a todo first passed regardless — this room brushed against a B two weeks ago. Landing line: A and B happen to careful people under pressure — that is why it needs a rule, not a scolding. BONUS BEAT (use in converge if energy is good, and this one IS true of the room): several 1.b fixes never became PRs at all — working code, invisible to review. What rule would catch a fix that never ships? ~4 min of reading.</a:t>
+              <a:t>[CALIBRATED from Lab 1.b, 2026-08-12: agenda held · prompting depth right · checkpoint gates worked · mostly solo, fine · room waits to be told → 4 seed clauses + 10-min derive]</a:t>
+            </a:r>
+          </a:p>
+          <a:p/>
+          <a:p>
+            <a:r>
+              <a:t>STIMULUS (settled 2026-08-12): all three are AUTHORED scenarios — nothing on screen is anyone's real diff, because the cohort's own 1.b PRs were all done properly. Say that as CREDIT, out loud: fix C is exactly what this room did. Then frame A and B as what happens on real teams on busy days — the situations are on the slide now. Give the two reading questions, then stop talking; the silence is deliberate.</a:t>
+            </a:r>
+          </a:p>
+          <a:p/>
+          <a:p>
+            <a:r>
+              <a:t>COMMON QUESTIONS</a:t>
+            </a:r>
+          </a:p>
+          <a:p/>
+          <a:p>
+            <a:r>
+              <a:t>Q: "Are these real?"</a:t>
+            </a:r>
+          </a:p>
+          <a:p>
+            <a:r>
+              <a:t>A: authored for this exercise; C mirrors your own PRs.</a:t>
+            </a:r>
+          </a:p>
+          <a:p/>
+          <a:p>
+            <a:r>
+              <a:t>Q: "How does B happen if nobody is careless?"</a:t>
+            </a:r>
+          </a:p>
+          <a:p>
+            <a:r>
+              <a:t>A: one mechanism — the test was written AFTER the fix and never run against the broken code; variants: weak assertions, testing the mock, an agent characterizing already-fixed code. Recall 1.b's fixture trap (the Jan-2026 completed todo): a stats test written without completing a todo first passed regardless — this room brushed against a B two weeks ago.</a:t>
+            </a:r>
+          </a:p>
+          <a:p/>
+          <a:p>
+            <a:r>
+              <a:t>Landing line: A and B happen to careful people under pressure — that is why it needs a rule, not a scolding.</a:t>
+            </a:r>
+          </a:p>
+          <a:p/>
+          <a:p>
+            <a:r>
+              <a:t>BONUS BEAT (use in converge if energy is good, and this one IS true of the room): several 1.b fixes never became PRs at all — working code, invisible to review. What rule would catch a fix that never ships?</a:t>
+            </a:r>
+          </a:p>
+          <a:p/>
+          <a:p>
+            <a:r>
+              <a:t>~4 min of reading.</a:t>
             </a:r>
           </a:p>
         </p:txBody>
@@ -1441,7 +1767,63 @@
           <a:lstStyle/>
           <a:p>
             <a:r>
-              <a:t>Present this in ONE minute, then start the clock and circulate — the structure is the mitigation for a cohort that waits to be told — and the INDIVIDUAL shape is deliberate: this course must survive becoming self-guided, and independent verdicts beat one early consensus. The catch-test ("which of A/B/C does this clause catch?") is self-administering: anyone who runs it honestly discovers that "ships with a test" does not catch B — the discovery the exercise exists for. COMMON QUESTIONS — Q: "What does mechanical mean, exactly?" A: a script, given ONLY the diff, could return pass/fail — if you need to know intent, it's fuzzy. Q: "Can a clause be conditional?" A: yes — "docs-only changes are exempt" is a fine clause, and note it: that exemption becomes a CI path filter next week. Q: "What if we all just agree?" A: run the catch-test out loud — which fix does each kept clause catch? If nothing on your list catches B, you are not done. Q: "Does wording matter?" A: substance now, wording when you write the NFR — the Doc list are raw material, not the document. ~1 min to present.</a:t>
+              <a:t>Present this in ONE minute, then start the clock and watch the Doc, not faces — the structure is the mitigation for a cohort that waits to be told — and the INDIVIDUAL shape is deliberate: this course must survive becoming self-guided, and independent verdicts beat one early consensus. The catch-test ("which of A/B/C does this clause catch?") is self-administering: anyone who runs it honestly discovers that "ships with a test" does not catch B — the discovery the exercise exists for.</a:t>
+            </a:r>
+          </a:p>
+          <a:p/>
+          <a:p>
+            <a:r>
+              <a:t>COMMON QUESTIONS</a:t>
+            </a:r>
+          </a:p>
+          <a:p/>
+          <a:p>
+            <a:r>
+              <a:t>Q: "What does mechanical mean, exactly?"</a:t>
+            </a:r>
+          </a:p>
+          <a:p>
+            <a:r>
+              <a:t>A: a script, given ONLY the diff, could return pass/fail — if you need to know intent, it's fuzzy.</a:t>
+            </a:r>
+          </a:p>
+          <a:p/>
+          <a:p>
+            <a:r>
+              <a:t>Q: "Can a clause be conditional?"</a:t>
+            </a:r>
+          </a:p>
+          <a:p>
+            <a:r>
+              <a:t>A: yes — "docs-only changes are exempt" is a fine clause, and note it: that exemption becomes a CI path filter next week.</a:t>
+            </a:r>
+          </a:p>
+          <a:p/>
+          <a:p>
+            <a:r>
+              <a:t>Q: "What if we all just agree?"</a:t>
+            </a:r>
+          </a:p>
+          <a:p>
+            <a:r>
+              <a:t>A: run the catch-test out loud — which fix does each kept clause catch? If nothing on your list catches B, you are not done.</a:t>
+            </a:r>
+          </a:p>
+          <a:p/>
+          <a:p>
+            <a:r>
+              <a:t>Q: "Does wording matter?"</a:t>
+            </a:r>
+          </a:p>
+          <a:p>
+            <a:r>
+              <a:t>A: substance now, wording when you write the NFR — the lists in the Doc are raw material, not the document.</a:t>
+            </a:r>
+          </a:p>
+          <a:p/>
+          <a:p>
+            <a:r>
+              <a:t>~1 min to present.</a:t>
             </a:r>
           </a:p>
         </p:txBody>
@@ -1511,7 +1893,19 @@
           <a:lstStyle/>
           <a:p>
             <a:r>
-              <a:t>[CALIBRATED from Lab 1.b, 2026-08-12: agenda held · prompting depth right · checkpoint gates worked · mostly solo, fine · room waits to be told → 4 seed clauses + 10-min derive] Ten minutes, silent, individual — mics muted, monitor the Doc as lists appear. 1.b says this cohort waits to be told, so the ladder is delivered as TIMED CHAT NUDGES to everyone, not as visits: at ~3 min, "Seed 2 — keep, tighten, or drop?"; at ~6, "Fix B is green. Would seed 1 alone have caught it?"; at ~8, "Which of your tags could a script actually decide?" Never state a clause. Individuals stuck beyond the nudges get a Slack ping, not a call-out. Watch the Doc for lists where B passes — the interesting case; do NOT flag it yet. Fast finishers: the store boundary, same method, as stretch. ~10 min.</a:t>
+              <a:t>[CALIBRATED from Lab 1.b, 2026-08-12: agenda held · prompting depth right · checkpoint gates worked · mostly solo, fine · room waits to be told → 4 seed clauses + 10-min derive]</a:t>
+            </a:r>
+          </a:p>
+          <a:p/>
+          <a:p>
+            <a:r>
+              <a:t>Ten minutes, silent, individual — mics muted, monitor the Doc as lists appear. 1.b says this cohort waits to be told, so the ladder is delivered as TIMED CHAT NUDGES to everyone, not as visits: at ~3 min, "Seed 2 — keep, tighten, or drop?"; at ~6, "Fix B is green. Would seed 1 alone have caught it?"; at ~8, "Which of your tags could a script actually decide?" Never state a clause. Individuals stuck beyond the nudges get a Slack ping, not a call-out. Watch the Doc for lists where B passes — the interesting case; do NOT flag it yet. Fast finishers: the store boundary, same method, as stretch.</a:t>
+            </a:r>
+          </a:p>
+          <a:p/>
+          <a:p>
+            <a:r>
+              <a:t>~10 min.</a:t>
             </a:r>
           </a:p>
         </p:txBody>
@@ -1581,7 +1975,64 @@
           <a:lstStyle/>
           <a:p>
             <a:r>
-              <a:t>[CALIBRATED from Lab 1.b, 2026-08-12: agenda held · prompting depth right · checkpoint gates worked · mostly solo, fine · room waits to be told → 4 seed clauses + 10-min derive] MANDATORY: state and write the agreed clauses before advancing — an unresolved compare is worse than none. Run it as: share the Doc on screen, name the clauses MOST lists agree on (those enter AGREED fast), then ask two or three people to unmute and read their LEAST-SURE clause (that is why they marked one) — divergence is where the standard gets made. Card contents are illustrative; replace live with what the room produced. If they missed "failed first", ask: "B was green before the fix. Would your rule have caught it?" Apply the tiebreak out mic when lists conflict: the stricter clause wins unless someone can show it false-positives on real code in this repo. COMMON QUESTIONS — Q: "Who owns this agreed list?" A: the class does, as of now — it goes in everyone's NFR; a champion owns keeping it true after today. Q: "My list disagrees with AGREED — do I write mine or ours?" A: ours — AGREED is the standard; record your dissent as a dropped clause with a reason, which is exactly how disagreement with a live standard works on a real team. Q: "Can we change the list later?" A: yes — NFRs revise in place; that is the lifecycle slide made real. ARTIFACT BEAT (30 sec, do not skip): ask "which artifact is this list?" and give ten seconds before answering — someone will say ADR, and that is the productive mistake: it FEELS like a decision, but the quick test says NFR (always-holds + checkable; present tense; revised in place). If adopting the rule ever becomes genuinely contested, THAT argument earns an ADR. And the know-how ("how do I write a failing test first?") is recipe material — a stretch, not today. One derivation, three artifact homes — the slide-6 skill, used on their own work. "The test failed first" is the clause that matters most, and no gate can decide it — that is the finding, and 2.b's opening problem. ~3 min.</a:t>
+              <a:t>[CALIBRATED from Lab 1.b, 2026-08-12: agenda held · prompting depth right · checkpoint gates worked · mostly solo, fine · room waits to be told → 4 seed clauses + 10-min derive]</a:t>
+            </a:r>
+          </a:p>
+          <a:p/>
+          <a:p>
+            <a:r>
+              <a:t>MANDATORY: state and write the agreed clauses before advancing — an unresolved compare is worse than none. Run it as: share the Doc on screen, name the clauses MOST lists agree on (those enter AGREED fast), then ask two or three people to unmute and read their LEAST-SURE clause (that is why they marked one) — divergence is where the standard gets made. Card contents are illustrative; replace live with what the room produced. If they missed "failed first", ask: "B was green before the fix. Would your rule have caught it?" Apply the tiebreak on mic when lists conflict: the stricter clause wins unless someone can show it false-positives on real code in this repo.</a:t>
+            </a:r>
+          </a:p>
+          <a:p/>
+          <a:p>
+            <a:r>
+              <a:t>COMMON QUESTIONS</a:t>
+            </a:r>
+          </a:p>
+          <a:p/>
+          <a:p>
+            <a:r>
+              <a:t>Q: "Who owns this agreed list?"</a:t>
+            </a:r>
+          </a:p>
+          <a:p>
+            <a:r>
+              <a:t>A: the class does, as of now — it goes in everyone's NFR; a champion owns keeping it true after today.</a:t>
+            </a:r>
+          </a:p>
+          <a:p/>
+          <a:p>
+            <a:r>
+              <a:t>Q: "My list disagrees with AGREED — do I write mine or ours?"</a:t>
+            </a:r>
+          </a:p>
+          <a:p>
+            <a:r>
+              <a:t>A: ours — AGREED is the standard; record your dissent as a dropped clause with a reason, which is exactly how disagreement with a live standard works on a real team.</a:t>
+            </a:r>
+          </a:p>
+          <a:p/>
+          <a:p>
+            <a:r>
+              <a:t>Q: "Can we change the list later?"</a:t>
+            </a:r>
+          </a:p>
+          <a:p>
+            <a:r>
+              <a:t>A: yes — NFRs revise in place; that is the lifecycle slide made real.</a:t>
+            </a:r>
+          </a:p>
+          <a:p/>
+          <a:p>
+            <a:r>
+              <a:t>ARTIFACT BEAT (30 sec, do not skip): ask "which artifact is this list?" and give ten seconds before answering — someone will say ADR, and that is the productive mistake: it FEELS like a decision, but the quick test says NFR (always-holds + checkable; present tense; revised in place). If adopting the rule ever becomes genuinely contested, THAT argument earns an ADR. And the know-how ("how do I write a failing test first?") is recipe material — a stretch, not today. One derivation, three artifact homes — the slide-6 skill, used on their own work. "The test failed first" is the clause that matters most, and no gate can decide it — that is the finding, and 2.b's opening problem.</a:t>
+            </a:r>
+          </a:p>
+          <a:p/>
+          <a:p>
+            <a:r>
+              <a:t>~3 min.</a:t>
             </a:r>
           </a:p>
         </p:txBody>
@@ -1651,7 +2102,98 @@
           <a:lstStyle/>
           <a:p>
             <a:r>
-              <a:t>THE GOAL OF THIS SLIDE, in one sentence: prove that the MECHANICAL/FUZZY tag they just put on their own clauses is not homework bookkeeping — it is a property every written rule already has, demonstrated in a file they already trust. Same CLAUDE.md, three rules, three enforcement states: the store boundary is WRITTEN and nothing checks it (their morning ADR subject — a rule can be documented and still be only a promise); console.log is CHECKED (lint fails it — the only one of the three that is actually a gate); logger.info with a wrong first arg is HALF-CHECKED — it looks enforced, passes silently, and that false confidence makes the half-gate the most dangerous state of the three, worse than unchecked because nobody is watching a rule they believe a machine watches. The three states are NAMED on the slide — walk them top to bottom, then land the last bullet as the bridge to the write-up: the Checked-by line is where each clause's state gets RECORDED, and 2.b is where the unchecked ones get teeth. If you want a discussion beat, ask "so which of these is a standard?" and answer it: all three (written + agreed) — what differs is only how much of each is backed by a check. FACT-CHECKED against the repo 2026-08-13: the shown call keeps the signature (scope, message, meta) typed correctly, so tsc passes it AND eslint passes it — only the CONVENTION (scope = file basename) is violated, and nothing checks that. Say the strengthened version out loud: TWO machine checkers watch this exact line, and the rule still slips through, because neither was aimed at it. This slide is a taught exhibit, NOT an exercise — do not invite a live paste-test. COMMON QUESTIONS — Q: "I tried a wrong first arg and the editor DID flag it" A: almost certainly the TYPE checker, because the pasted call dropped the message argument — a shape error, not the convention; keep all three args typed right and every checker goes quiet. And that near-miss IS the lesson: an error NEAR a rule reads as enforcement of the rule, which is how half-gates stay invisible. Q: "What is meta?" A: the optional third argument — a plain object of structured context (Record&lt;string, unknown&gt;) that the logger JSON-stringifies onto the log line; the ? means optional, borrowed from TypeScript. VALID (all pass tsc): logger.info('todos.service', 'created', { id }) — object literal in the third slot; logger.info('http', 'GET /api/todos 200', { durationMs }) — the live call in requestLogger.ts; logger.info('index', 'server started') — meta omitted entirely, that is what optional means. INVALID (each verified against tsc 2026-08-13): logger.info('todos.service', { id }) — only two args, so the object sits in the MESSAGE slot, which must be a string (the classic mistake); logger.info('todos.service', 'created', 'id=' + id) — meta must be an object, never a pre-formatted string: put values IN the object; logger.info('todos.service', 'created', id) — a bare value is not a Record: wrap it as { id }. Rule of thumb: two strings, then one object or nothing. Q: "Isn't the scope convention FUZZY, then — nothing checks it?" A: no — unchecked and UNCHECKABLE are different facts. CAN a machine check it? Yes: the linter always knows which file it is in, so a rule comparing the first-arg literal to the file basename is a dumb string comparison — MECHANICAL. DOES anything check it today? No — nobody wrote that rule. Checkable-but-unchecked is exactly what a half-gate is. Contrast: "the test failed before the fix" is UNCHECKABLE from the code — that one is fuzzy. (Full honesty for a sharp room: a variable first arg defeats the literal comparison, so strictly the clause is PARTLY — 2.b names that tier.) Q: "So is the logging rule enforced or not?" A: half — the channel is enforced, the content is not; "enforced" is per-CLAUSE, never per-rule, which is why your NFR marks each clause separately. Q: "Why not just fix the half-gate now?" A: it is an ESLint rule away and makes a fine stretch — but today the point is SEEING the state, not fixing it; you will close a gap like this in 2.b. ~2 min.</a:t>
+              <a:t>THE GOAL OF THIS SLIDE, in one sentence: prove that the MECHANICAL/FUZZY tag they just put on their own clauses is not homework bookkeeping — it is a property every written rule already has, demonstrated in a file they already trust. Same CLAUDE.md, three rules, three enforcement states: the store boundary is WRITTEN and nothing checks it (their morning ADR subject — a rule can be documented and still be only a promise); console.log is CHECKED (lint fails it — the only one of the three that is actually a gate); logger.info with a wrong first arg is HALF-CHECKED — it looks enforced, passes silently, and that false confidence makes the half-gate the most dangerous state of the three, worse than unchecked because nobody is watching a rule they believe a machine watches. The three states are NAMED on the slide — walk them top to bottom, then land the last bullet as the bridge to the write-up: the Checked-by line is where each clause's state gets RECORDED, and 2.b is where the unchecked ones get teeth. If you want a discussion beat, ask "so which of these is a standard?" and answer it: all three (written + agreed) — what differs is only how much of each is backed by a check.</a:t>
+            </a:r>
+          </a:p>
+          <a:p/>
+          <a:p>
+            <a:r>
+              <a:t>FACT-CHECKED against the repo 2026-08-13: the shown call keeps the signature (scope, message, meta) typed correctly, so tsc passes it AND eslint passes it — only the CONVENTION (scope = file basename) is violated, and nothing checks that. Say the strengthened version out loud: TWO machine checkers watch this exact line, and the rule still slips through, because neither was aimed at it. This slide is a taught exhibit, NOT an exercise — do not invite a live paste-test.</a:t>
+            </a:r>
+          </a:p>
+          <a:p/>
+          <a:p>
+            <a:r>
+              <a:t>COMMON QUESTIONS</a:t>
+            </a:r>
+          </a:p>
+          <a:p/>
+          <a:p>
+            <a:r>
+              <a:t>Q: "I tried a wrong first arg and the editor DID flag it"</a:t>
+            </a:r>
+          </a:p>
+          <a:p>
+            <a:r>
+              <a:t>A: almost certainly the TYPE checker, because the pasted call dropped the message argument — a shape error, not the convention; keep all three args typed right and every checker goes quiet. And that near-miss IS the lesson: an error NEAR a rule reads as enforcement of the rule, which is how half-gates stay invisible.</a:t>
+            </a:r>
+          </a:p>
+          <a:p/>
+          <a:p>
+            <a:r>
+              <a:t>Q: "What is meta?"</a:t>
+            </a:r>
+          </a:p>
+          <a:p>
+            <a:r>
+              <a:t>A: the optional third argument — a plain object of structured context (Record&lt;string, unknown&gt;) that the logger JSON-stringifies onto the log line; the ? means optional, borrowed from TypeScript.</a:t>
+            </a:r>
+          </a:p>
+          <a:p/>
+          <a:p>
+            <a:r>
+              <a:t>VALID (all pass tsc): logger.info('todos.service', 'created', { id }) — object literal in the third slot; logger.info('http', 'GET /api/todos 200', { durationMs }) — the live call in requestLogger.ts; logger.info('index', 'server started') — meta omitted entirely, that is what optional means.</a:t>
+            </a:r>
+          </a:p>
+          <a:p/>
+          <a:p>
+            <a:r>
+              <a:t>INVALID (each verified against tsc 2026-08-13): logger.info('todos.service', { id }) — only two args, so the object sits in the MESSAGE slot, which must be a string (the classic mistake); logger.info('todos.service', 'created', 'id=' + id) — meta must be an object, never a pre-formatted string: put values IN the object; logger.info('todos.service', 'created', id) — a bare value is not a Record: wrap it as { id }.</a:t>
+            </a:r>
+          </a:p>
+          <a:p/>
+          <a:p>
+            <a:r>
+              <a:t>Rule of thumb: two strings, then one object or nothing.</a:t>
+            </a:r>
+          </a:p>
+          <a:p/>
+          <a:p>
+            <a:r>
+              <a:t>Q: "Isn't the scope convention FUZZY, then — nothing checks it?"</a:t>
+            </a:r>
+          </a:p>
+          <a:p>
+            <a:r>
+              <a:t>A: no — unchecked and UNCHECKABLE are different facts. CAN a machine check it? Yes: the linter always knows which file it is in, so a rule comparing the first-arg literal to the file basename is a dumb string comparison — MECHANICAL. DOES anything check it today? No — nobody wrote that rule. Checkable-but-unchecked is exactly what a half-gate is. Contrast: "the test failed before the fix" is UNCHECKABLE from the code — that one is fuzzy. (Full honesty for a sharp room: a variable first arg defeats the literal comparison, so strictly the clause is PARTLY — 2.b names that tier.)</a:t>
+            </a:r>
+          </a:p>
+          <a:p/>
+          <a:p>
+            <a:r>
+              <a:t>Q: "So is the logging rule enforced or not?"</a:t>
+            </a:r>
+          </a:p>
+          <a:p>
+            <a:r>
+              <a:t>A: half — the channel is enforced, the content is not; "enforced" is per-CLAUSE, never per-rule, which is why your NFR marks each clause separately.</a:t>
+            </a:r>
+          </a:p>
+          <a:p/>
+          <a:p>
+            <a:r>
+              <a:t>Q: "Why not just fix the half-gate now?"</a:t>
+            </a:r>
+          </a:p>
+          <a:p>
+            <a:r>
+              <a:t>A: it is an ESLint rule away and makes a fine stretch — but today the point is SEEING the state, not fixing it; you will close a gap like this in 2.b.</a:t>
+            </a:r>
+          </a:p>
+          <a:p/>
+          <a:p>
+            <a:r>
+              <a:t>~2 min.</a:t>
             </a:r>
           </a:p>
         </p:txBody>
@@ -1721,7 +2263,13 @@
           <a:lstStyle/>
           <a:p>
             <a:r>
-              <a:t>Timing is the point: AFTER the room commits, so it reads as comparison, not answer key. Sanitised — no client, product, or domain detail; if asked, "another engagement, and that is all I can say." ~2 min.</a:t>
+              <a:t>Timing is the point: AFTER the room commits, so it reads as comparison, not answer key. Sanitised — no client, product, or domain detail; if asked, "another engagement, and that is all I can say."</a:t>
+            </a:r>
+          </a:p>
+          <a:p/>
+          <a:p>
+            <a:r>
+              <a:t>~2 min.</a:t>
             </a:r>
           </a:p>
         </p:txBody>
@@ -1791,7 +2339,69 @@
           <a:lstStyle/>
           <a:p>
             <a:r>
-              <a:t>[CALIBRATED from Lab 1.b, 2026-08-12: agenda held · prompting depth right · checkpoint gates worked · mostly solo, fine · room waits to be told → 4 seed clauses + 10-min derive] One recurring chat nudge: "how is that clause checked?" If someone cannot answer, the clause is not finished. The skeleton on screen is also in the handout. Reserve the last five minutes for peer review — it is an acceptance criterion and the first thing skipped. COMMON QUESTIONS — Q: "We all start from the same AGREED list — does everyone write the same NFR?" A: same clauses, YOUR document: your wording, your Checked-by lines, your marks, your dropped-clause dissents; the peer review is what catches where wording changed the meaning. Q: "What filename?" A: docs/nfr/0002-test-discipline.md — next number, kebab-case, like the ADR (the store-boundary stretch would be 0003). Q: "Do dropped clauses go in?" A: yes, one line each at the bottom with the drop decision and a name — a visibly-considered-and-dropped clause stops the same debate re-running next quarter. Q: "How formal is the wording?" A: NFR-0001's tone: plain sentences, numbered, no legalese — the Checked-by line is where the rigour lives. ~20 min.</a:t>
+              <a:t>[CALIBRATED from Lab 1.b, 2026-08-12: agenda held · prompting depth right · checkpoint gates worked · mostly solo, fine · room waits to be told → 4 seed clauses + 10-min derive]</a:t>
+            </a:r>
+          </a:p>
+          <a:p/>
+          <a:p>
+            <a:r>
+              <a:t>One recurring chat nudge: "how is that clause checked?" If someone cannot answer, the clause is not finished. The skeleton on screen is also in the handout. Reserve the last five minutes for peer review — it is an acceptance criterion and the first thing skipped.</a:t>
+            </a:r>
+          </a:p>
+          <a:p/>
+          <a:p>
+            <a:r>
+              <a:t>COMMON QUESTIONS</a:t>
+            </a:r>
+          </a:p>
+          <a:p/>
+          <a:p>
+            <a:r>
+              <a:t>Q: "We all start from the same AGREED list — does everyone write the same NFR?"</a:t>
+            </a:r>
+          </a:p>
+          <a:p>
+            <a:r>
+              <a:t>A: same clauses, YOUR document: your wording, your Checked-by lines, your marks, your dropped-clause dissents; the peer review is what catches where wording changed the meaning.</a:t>
+            </a:r>
+          </a:p>
+          <a:p/>
+          <a:p>
+            <a:r>
+              <a:t>Q: "What filename?"</a:t>
+            </a:r>
+          </a:p>
+          <a:p>
+            <a:r>
+              <a:t>A: docs/nfr/0002-test-discipline.md — next number, kebab-case, like the ADR (the store-boundary stretch would be 0003).</a:t>
+            </a:r>
+          </a:p>
+          <a:p/>
+          <a:p>
+            <a:r>
+              <a:t>Q: "Do dropped clauses go in?"</a:t>
+            </a:r>
+          </a:p>
+          <a:p>
+            <a:r>
+              <a:t>A: yes, one line each at the bottom with the drop decision and a name — a visibly-considered-and-dropped clause stops the same debate re-running next quarter.</a:t>
+            </a:r>
+          </a:p>
+          <a:p/>
+          <a:p>
+            <a:r>
+              <a:t>Q: "How formal is the wording?"</a:t>
+            </a:r>
+          </a:p>
+          <a:p>
+            <a:r>
+              <a:t>A: NFR-0001's tone: plain sentences, numbered, no legalese — the Checked-by line is where the rigour lives.</a:t>
+            </a:r>
+          </a:p>
+          <a:p/>
+          <a:p>
+            <a:r>
+              <a:t>~20 min.</a:t>
             </a:r>
           </a:p>
         </p:txBody>
@@ -1861,7 +2471,19 @@
           <a:lstStyle/>
           <a:p>
             <a:r>
-              <a:t>[CALIBRATED from Lab 1.b, 2026-08-12: agenda held · prompting depth right · checkpoint gates worked · mostly solo, fine · room waits to be told → 4 seed clauses + 10-min derive] Ask two or three people to unmute and read a fuzzy clause with its recorded decision — two minutes, and it makes the standard real. The common failure here: a "Checked by: code review" line on every clause — that is the human gate as a reflex, not a decision; push once: "could a script check THIS one?" Fast finishers: the half-gate stretch (write the ESLint clause) or the rules-file conversion. ~2 min.</a:t>
+              <a:t>[CALIBRATED from Lab 1.b, 2026-08-12: agenda held · prompting depth right · checkpoint gates worked · mostly solo, fine · room waits to be told → 4 seed clauses + 10-min derive]</a:t>
+            </a:r>
+          </a:p>
+          <a:p/>
+          <a:p>
+            <a:r>
+              <a:t>Ask two or three people to unmute and read a fuzzy clause with its recorded decision — two minutes, and it makes the standard real. The common failure here: a "Checked by: code review" line on every clause — that is the human gate as a reflex, not a decision; push once: "could a script check THIS one?" Fast finishers: the half-gate stretch (write the ESLint clause) or the rules-file conversion.</a:t>
+            </a:r>
+          </a:p>
+          <a:p/>
+          <a:p>
+            <a:r>
+              <a:t>~2 min.</a:t>
             </a:r>
           </a:p>
         </p:txBody>
@@ -1931,7 +2553,116 @@
           <a:lstStyle/>
           <a:p>
             <a:r>
-              <a:t>The slide before showed WHAT the two entries are; this one says what each DOES — same rule, referenced twice, two different jobs. Say the mechanics precisely. The BINDING LINE enforces by PRESENCE: it is the rule's one operative sentence living inside CLAUDE.md, so it is in context every session — loaded once with the file, no separate fetch, and above all no DECISION: the trigger row works only if Claude correctly decides the situation applies; the binding line arrives whether or not anything decides anything. SAY THE WORD OUT LOUD BEFORE THE ROOM MISREADS IT: binding as in a binding CONTRACT — the line is the rule, in force — NOT binding as in data-binding; it does not wire anything to anything, and its citation loads nothing. Developers reliably hear the wrong one first. The TRIGGER ROW, by contrast, has two parts and naming them helps: a SITUATION ("when you are fixing a bug") and a POINTER ("read docs/nfr/0002 first") — the pointer gives Claude the ABILITY to load the full doc; the situation says WHEN to use it. (Precision for the sharp student: CLAUDE.md itself IS read at session start — the claim is not "never loaded", it is "never conditional".) Its (NFR-0002) tail is a CITATION, not a loader: it tells Claude and humans where the full law lives, one deliberate hop away. The TRIGGER ROW loads by SITUATION: when the task matches "fixing a bug or adding behaviour", Claude goes and reads the whole NFR — every clause, Checked-by line, dropped clause. TWO PATHS to the full document, and only one is designed: (1) the trigger row — the situation matches, the doc is read; this is the reliable path. (2) following the citation — Claude (or a person) mid-task decides it needs more than the headline and chases NFR-0002; possible because the citation exists, but voluntary — nothing forces it. Delete the trigger row and path 2 still exists, but now you are relying on Claude spontaneously deciding to look things up — hope-based governance, the exact thing this lab replaces. Anchor in 1.a: the trigger row is the lazy pointer they already know; the binding line is a deliberate one-line eager load, kept to one sentence precisely because eager space is paid every session. Kill each one mentally to prove both are needed: no binding line, and the always-applies rule hangs on Claude deciding to fetch; no trigger row, and the details (how each clause is checked, the exceptions) are unreachable by situation. The binding line is new vocabulary and it is graded. WHEN IS A BINDING LINE NEEDED — give them the test, then the repo's own contrast: ask "in what situation does this rule apply?" If you can name one narrower than ANY CHANGE, the trigger row is enough — that is why NFR-0001 needs NO binding line: "calling an external API" is a nameable situation, so its trigger row suffices. Test discipline applies to every change — no situation could trigger the fetch reliably — so it is the first rule in this repo that EARNS the eager line. Expect binding lines to stay RARE: a CLAUDE.md full of them is just a second copy of every document — one or two in a healthy file. COMMON QUESTIONS — Q: "Why not just make the binding line say READ docs/nfr/0002 before any change?" A: three reasons. One: that converts a one-line cost into a full-document fetch on every session, to retrieve a rule whose operative sentence fits in one line. Two: "always read X first" is the weakest kind of instruction — under pressure it gets skipped, while a rule stated in place is simply THERE; the sign on the wall works because it IS the rule, not directions to the rulebook. Three: the binding line already cites NFR-0002, so the full law — all clauses, Checked-by lines, dropped clauses — is one hop away when nuance is needed. Q: "Then why not paste the whole NFR into CLAUDE.md?" A: one home per fact — a copy drifts from the doc and then nobody knows which is authoritative; and CLAUDE.md is a paid-every-session index, not a library. Q: "The trigger row already says fixing-a-bug -&gt; read the NFR — is the binding line not redundant?" A: the trigger is a fetch DECISION Claude makes each time, and a rule that applies to every change would need that decision made right every time; the binding line is deterministic presence. Redundant on purpose — like the deny rule and the hook next week. Q: "Why doesn't the binding line load the NFR when I am fixing a bug?" A: nothing in CLAUDE.md EXECUTES — every entry is a sentence Claude obeys, and each does exactly what its text says: "Read first: docs/nfr/0002" instructs a read, "ships with a test" instructs a test. The load while bug-fixing comes from the trigger row, the only sentence that says READ. Q: "Is the trigger row enforced?" A: no — all of this wiring is layer 1, instruction; nothing verifies the read happened, and the smoke test is a manual probe, not a gate. Next week does NOT change that: 2.b enforces the OUTCOME (a test in the diff, via hook + CI gate), never the reading — you cannot usefully gate "did the model read the doc", you gate the consequence, and once the outcome is gated the read matters less. Layer 1 informs; layers 2–4 enforce. The smoke test takes 60 seconds: new session, ask the rule, watch whether it reads the doc or guesses. If it guesses, the trigger is phrased as a topic, not a situation — fixable in one edit. ~9 min.</a:t>
+              <a:t>The slide before showed WHAT the two entries are; this one says what each DOES — same rule, referenced twice, two different jobs. Say the mechanics precisely. The BINDING LINE enforces by PRESENCE: it is the rule's one operative sentence living inside CLAUDE.md, so it is in context every session — loaded once with the file, no separate fetch, and above all no DECISION: the trigger row works only if Claude correctly decides the situation applies; the binding line arrives whether or not anything decides anything. (Precision for the sharp student: CLAUDE.md itself IS read at session start — the claim is not "never loaded", it is "never conditional".) The binding line's (NFR-0002) tail is a CITATION, not a loader: it tells Claude and humans where the full law lives, one deliberate hop away.</a:t>
+            </a:r>
+          </a:p>
+          <a:p/>
+          <a:p>
+            <a:r>
+              <a:t>SAY THE WORD OUT LOUD BEFORE THE ROOM MISREADS IT: binding as in a binding CONTRACT — the line is the rule, in force — NOT binding as in data-binding; it does not wire anything to anything, and its citation loads nothing. Developers reliably hear the wrong one first. The TRIGGER ROW has two parts, and naming them helps: a SITUATION ("when you are fixing a bug or adding behaviour") and a POINTER ("read docs/nfr/0002 first") — the pointer gives Claude the ABILITY to load the full doc; the situation says WHEN. Task matches, Claude reads the whole NFR: every clause, Checked-by line, dropped clause.</a:t>
+            </a:r>
+          </a:p>
+          <a:p/>
+          <a:p>
+            <a:r>
+              <a:t>TWO PATHS to the full document, and only one is designed: (1) the trigger row — the situation matches, the doc is read; this is the reliable path. (2) following the citation — Claude (or a person) mid-task decides it needs more than the headline and chases NFR-0002; possible because the citation exists, but voluntary — nothing forces it. Delete the trigger row and path 2 still exists, but now you are relying on Claude spontaneously deciding to look things up — hope-based governance, the exact thing this lab replaces.</a:t>
+            </a:r>
+          </a:p>
+          <a:p/>
+          <a:p>
+            <a:r>
+              <a:t>Anchor in 1.a: the trigger row is the lazy pointer they already know; the binding line is a deliberate one-line eager load, kept to one sentence precisely because eager space is paid every session.</a:t>
+            </a:r>
+          </a:p>
+          <a:p/>
+          <a:p>
+            <a:r>
+              <a:t>Kill each one mentally to prove both are needed: no binding line, and the always-applies rule hangs on Claude deciding to fetch; no trigger row, and the details (how each clause is checked, the exceptions) are unreachable by situation. The binding line is new vocabulary and it is graded.</a:t>
+            </a:r>
+          </a:p>
+          <a:p/>
+          <a:p>
+            <a:r>
+              <a:t>WHEN IS A BINDING LINE NEEDED — give them the test, then the repo's own contrast: ask "in what situation does this rule apply?" If you can name one narrower than ANY CHANGE, the trigger row is enough — that is why NFR-0001 needs NO binding line: "calling an external API" is a nameable situation, so its trigger row suffices. Test discipline applies to every change — no situation could trigger the fetch reliably — so it is the first rule in this repo that EARNS the eager line.</a:t>
+            </a:r>
+          </a:p>
+          <a:p/>
+          <a:p>
+            <a:r>
+              <a:t>Expect binding lines to stay RARE: a CLAUDE.md full of them is just a second copy of every document — one or two in a healthy file.</a:t>
+            </a:r>
+          </a:p>
+          <a:p/>
+          <a:p>
+            <a:r>
+              <a:t>COMMON QUESTIONS</a:t>
+            </a:r>
+          </a:p>
+          <a:p/>
+          <a:p>
+            <a:r>
+              <a:t>Q: "Why not just make the binding line say READ docs/nfr/0002 before any change?"</a:t>
+            </a:r>
+          </a:p>
+          <a:p>
+            <a:r>
+              <a:t>A: three reasons. One: that converts a one-line cost into a full-document fetch on every session, to retrieve a rule whose operative sentence fits in one line. Two: "always read X first" is the weakest kind of instruction — under pressure it gets skipped, while a rule stated in place is simply THERE; the sign on the wall works because it IS the rule, not directions to the rulebook. Three: the binding line already cites NFR-0002, so the full law — all clauses, Checked-by lines, dropped clauses — is one hop away when nuance is needed.</a:t>
+            </a:r>
+          </a:p>
+          <a:p/>
+          <a:p>
+            <a:r>
+              <a:t>Q: "Then why not paste the whole NFR into CLAUDE.md?"</a:t>
+            </a:r>
+          </a:p>
+          <a:p>
+            <a:r>
+              <a:t>A: one home per fact — a copy drifts from the doc and then nobody knows which is authoritative; and CLAUDE.md is a paid-every-session index, not a library.</a:t>
+            </a:r>
+          </a:p>
+          <a:p/>
+          <a:p>
+            <a:r>
+              <a:t>Q: "The trigger row already says fixing-a-bug -&gt; read the NFR — is the binding line not redundant?"</a:t>
+            </a:r>
+          </a:p>
+          <a:p>
+            <a:r>
+              <a:t>A: the trigger is a fetch DECISION Claude makes each time, and a rule that applies to every change would need that decision made right every time; the binding line is deterministic presence. Redundant on purpose — like the deny rule and the hook next week.</a:t>
+            </a:r>
+          </a:p>
+          <a:p/>
+          <a:p>
+            <a:r>
+              <a:t>Q: "Why doesn't the binding line load the NFR when I am fixing a bug?"</a:t>
+            </a:r>
+          </a:p>
+          <a:p>
+            <a:r>
+              <a:t>A: nothing in CLAUDE.md EXECUTES — every entry is a sentence Claude obeys, and each does exactly what its text says: "Read first: docs/nfr/0002" instructs a read, "ships with a test" instructs a test. The load while bug-fixing comes from the trigger row, the only sentence that says READ.</a:t>
+            </a:r>
+          </a:p>
+          <a:p/>
+          <a:p>
+            <a:r>
+              <a:t>Q: "Is the trigger row enforced?"</a:t>
+            </a:r>
+          </a:p>
+          <a:p>
+            <a:r>
+              <a:t>A: no — all of this wiring is layer 1, instruction; nothing verifies the read happened, and the smoke test is a manual probe, not a gate. Next week does NOT change that: 2.b enforces the OUTCOME (a test in the diff, via hook + CI gate), never the reading — you cannot usefully gate "did the model read the doc", you gate the consequence, and once the outcome is gated the read matters less. Layer 1 informs; layers 2–4 enforce.</a:t>
+            </a:r>
+          </a:p>
+          <a:p/>
+          <a:p>
+            <a:r>
+              <a:t>The smoke test takes 60 seconds: new session, ask the rule, watch whether it reads the doc or guesses. If it guesses, the trigger is phrased as a topic, not a situation — fixable in one edit.</a:t>
+            </a:r>
+          </a:p>
+          <a:p/>
+          <a:p>
+            <a:r>
+              <a:t>~9 min.</a:t>
             </a:r>
           </a:p>
         </p:txBody>
@@ -2001,7 +2732,13 @@
           <a:lstStyle/>
           <a:p>
             <a:r>
-              <a:t>[CALIBRATED from Lab 1.b, 2026-08-12: agenda held · prompting depth right · checkpoint gates worked · mostly solo, fine · room waits to be told → 4 seed clauses + 10-min derive] Do not skip this to buy build time — it is the review+capture close Format B requires. COPY THE CHAT BEFORE ENDING THE CALL — Meet deletes it, and the Decision sentences, the AGREED clause list, and the retro lines all feed the capture. INSTRUCTOR, within 24h: file the lab-capture entry (AI-Transformation-Playbook/04-labs/lab-capture-template.md) — what was built, stuck points, timings, refinements. This deck is the Format B pilot; the capture entry is how it gets validated. ~4 min.</a:t>
+              <a:t>The summary slide of the wire-in — read it BY JOBS, one row at a time, and let it preview 2.b. Two facts to land while reading. FIRST, one home per fact survives: none of the four references duplicates the law — the binding line states one headline sentence and cites the doc; the trigger row points at the doc; the hook and the gate re-encode ONE mechanical clause each, and a human writes that encoding — the gate does not read the NFR, it greps the diff for what the clause says. SECOND, the layer split: both CLAUDE.md rows are layer 1 — instruction, never validated, never enforced — and stay that way forever; enforcement arrives next week as SEPARATE artifacts at layers 2 and 4, and even then it is the OUTCOME of the clause that gets checked, never whether anything was read. If one table survives the block in their heads, it is this one.</a:t>
+            </a:r>
+          </a:p>
+          <a:p/>
+          <a:p>
+            <a:r>
+              <a:t>~1 min.</a:t>
             </a:r>
           </a:p>
         </p:txBody>
@@ -2071,7 +2808,13 @@
           <a:lstStyle/>
           <a:p>
             <a:r>
-              <a:t>Do not oversell — this room is already positive about AI; the pitch is "stop solving the same problem sixteen times." Land the vocabulary on card 3, once, and reuse it all day: a RULE is what the team agrees on; a DOCUMENT is where the rule lives (one document can hold many rules); a rule written down and agreed is a STANDARD — the same definition the distribution guide uses. Then land the ETH note: the point is not "AI cannot write docs", it is that a doc nobody thought about is negative value. Ask who has run /init and never read the output in chat, as a +1 — the +1s will come. Source link is in the handout. ~3 min.</a:t>
+              <a:t>Do not oversell — this room is already positive about AI; the pitch is "stop solving the same problem sixteen times." Land the vocabulary on card 3, once, and reuse it all day: a RULE is what the team agrees on; a DOCUMENT is where the rule lives (one document can hold many rules); a rule written down and agreed is a STANDARD — the same definition the distribution guide uses. Then land the ETH note: the point is not "AI cannot write docs", it is that a doc nobody thought about is negative value. Ask who has run /init and never read the output in chat, as a +1 — the +1s will come. Source link is in the handout.</a:t>
+            </a:r>
+          </a:p>
+          <a:p/>
+          <a:p>
+            <a:r>
+              <a:t>~3 min.</a:t>
             </a:r>
           </a:p>
         </p:txBody>
@@ -2141,7 +2884,101 @@
           <a:lstStyle/>
           <a:p>
             <a:r>
-              <a:t>Land the through-line: last week a habit, this week a standard, next week a gate. The wrap checklist mirrors the handout acceptance criteria exactly — read it as one list, not highlights. ~1 min.</a:t>
+              <a:t>[CALIBRATED from Lab 1.b, 2026-08-12: agenda held · prompting depth right · checkpoint gates worked · mostly solo, fine · room waits to be told → 4 seed clauses + 10-min derive]</a:t>
+            </a:r>
+          </a:p>
+          <a:p/>
+          <a:p>
+            <a:r>
+              <a:t>Do not skip this to buy build time — it is the review+capture close Format B requires.</a:t>
+            </a:r>
+          </a:p>
+          <a:p/>
+          <a:p>
+            <a:r>
+              <a:t>COPY THE CHAT BEFORE ENDING THE CALL — Meet deletes it, and the Decision sentences, the AGREED clause list, and the retro lines all feed the capture. INSTRUCTOR, within 24h: file the lab-capture entry (AI-Transformation-Playbook/04-labs/lab-capture-template.md) — what was built, stuck points, timings, refinements. This deck is the Format B pilot; the capture entry is how it gets validated.</a:t>
+            </a:r>
+          </a:p>
+          <a:p/>
+          <a:p>
+            <a:r>
+              <a:t>~4 min.</a:t>
+            </a:r>
+          </a:p>
+        </p:txBody>
+      </p:sp>
+      <p:sp>
+        <p:nvSpPr>
+          <p:cNvPr id="4" name="Slide Number Placeholder 3"/>
+          <p:cNvSpPr>
+            <a:spLocks noGrp="1"/>
+          </p:cNvSpPr>
+          <p:nvPr>
+            <p:ph type="sldNum" idx="5" sz="quarter"/>
+          </p:nvPr>
+        </p:nvSpPr>
+        <p:spPr/>
+      </p:sp>
+    </p:spTree>
+  </p:cSld>
+  <p:clrMapOvr>
+    <a:masterClrMapping/>
+  </p:clrMapOvr>
+</p:notes>
+</file>
+
+<file path=ppt/notesSlides/notesSlide31.xml><?xml version="1.0" encoding="utf-8"?>
+<p:notes xmlns:a="http://schemas.openxmlformats.org/drawingml/2006/main" xmlns:p="http://schemas.openxmlformats.org/presentationml/2006/main" xmlns:r="http://schemas.openxmlformats.org/officeDocument/2006/relationships">
+  <p:cSld>
+    <p:spTree>
+      <p:nvGrpSpPr>
+        <p:cNvPr id="1" name=""/>
+        <p:cNvGrpSpPr/>
+        <p:nvPr/>
+      </p:nvGrpSpPr>
+      <p:grpSpPr>
+        <a:xfrm>
+          <a:off x="0" y="0"/>
+          <a:ext cx="0" cy="0"/>
+          <a:chOff x="0" y="0"/>
+          <a:chExt cx="0" cy="0"/>
+        </a:xfrm>
+      </p:grpSpPr>
+      <p:sp>
+        <p:nvSpPr>
+          <p:cNvPr id="2" name="Slide Image Placeholder 1"/>
+          <p:cNvSpPr>
+            <a:spLocks noGrp="1"/>
+          </p:cNvSpPr>
+          <p:nvPr>
+            <p:ph type="sldImg" idx="2"/>
+          </p:nvPr>
+        </p:nvSpPr>
+        <p:spPr/>
+      </p:sp>
+      <p:sp>
+        <p:nvSpPr>
+          <p:cNvPr id="3" name="Notes Placeholder 2"/>
+          <p:cNvSpPr>
+            <a:spLocks noGrp="1"/>
+          </p:cNvSpPr>
+          <p:nvPr>
+            <p:ph type="body" idx="3" sz="quarter"/>
+          </p:nvPr>
+        </p:nvSpPr>
+        <p:spPr/>
+        <p:txBody>
+          <a:bodyPr/>
+          <a:lstStyle/>
+          <a:p>
+            <a:r>
+              <a:t>Land the through-line: last week a habit, this week a standard, next week a gate. The wrap checklist mirrors the handout acceptance criteria exactly — read it as one list, not highlights.</a:t>
+            </a:r>
+          </a:p>
+          <a:p/>
+          <a:p>
+            <a:r>
+              <a:t>~1 min.</a:t>
             </a:r>
           </a:p>
         </p:txBody>
@@ -2211,7 +3048,13 @@
           <a:lstStyle/>
           <a:p>
             <a:r>
-              <a:t>The sorting question — say it twice: WHO must obey this rule? Everyone everywhere → Collective. Everyone in this repo → Project. Only some files → Feature/path. All three example rules are real and in this repo right now; open CLAUDE.md line 72 if anyone doubts the secrets one. The footnote is the payoff: the secrets rule is mis-layered today, and the room can SEE it — that mismatch is why the sixth artifact (an org-wide home + how repos inherit from it) exists, and 2.b hands it to them to define. Today all their work is Project-layer. ~3 min.</a:t>
+              <a:t>The sorting question — say it twice: WHO must obey this rule? Everyone everywhere → Collective. Everyone in this repo → Project. Only some files → Feature/path. All three example rules are real and in this repo right now; open CLAUDE.md line 72 if anyone doubts the secrets one. The footnote is the payoff: the secrets rule is mis-layered today, and the room can SEE it — that mismatch is why the sixth artifact (an org-wide home + how repos inherit from it) exists, and 2.b hands it to them to define. Today all their work is Project-layer.</a:t>
+            </a:r>
+          </a:p>
+          <a:p/>
+          <a:p>
+            <a:r>
+              <a:t>~3 min.</a:t>
             </a:r>
           </a:p>
         </p:txBody>
@@ -2281,7 +3124,13 @@
           <a:lstStyle/>
           <a:p>
             <a:r>
-              <a:t>Read the middle column aloud, row by row — the questions do the teaching. The expansions (Architecture Decision Record, Non-Functional Requirement) get said out loud exactly once, here. Then the footnote, with this repo's pair as the example: the envelope rule is an NFR — every response uses it, checkable, a bare res.json() is a defect. adding-a-resource.md is a recipe — the recommended steps; you may add a resource differently and violate nothing, as long as the envelope rule still holds. Binding vs guiding is the line. ~2 min.</a:t>
+              <a:t>Read the middle column aloud, row by row — the questions do the teaching. The expansions (Architecture Decision Record, Non-Functional Requirement) get said out loud exactly once, here. Then the footnote, with this repo's pair as the example: the envelope rule is an NFR — every response uses it, checkable, a bare res.json() is a defect. adding-a-resource.md is a recipe — the recommended steps; you may add a resource differently and violate nothing, as long as the envelope rule still holds. Binding vs guiding is the line.</a:t>
+            </a:r>
+          </a:p>
+          <a:p/>
+          <a:p>
+            <a:r>
+              <a:t>~2 min.</a:t>
             </a:r>
           </a:p>
         </p:txBody>
@@ -2351,7 +3200,13 @@
           <a:lstStyle/>
           <a:p>
             <a:r>
-              <a:t>THE slide of the block — spend time here. Walk the same subject across all five rows, then land the one-word summary. If someone says "that is a lot of documents for one rule" — good: you would not write all five; you write the one that answers the question you actually have. EXPECT the pairing question ("does every NFR have an ADR?"): no, and no — they pair ONLY when one subject has both a contested decision AND a checkable standing rule, like this boundary. NFR-0001 has no ADR (hygiene, not a decision); a cloud-choice ADR would have no NFR (nothing to check per PR). When both exist they cross-reference, never duplicate: the NFR says "rationale: ADR-0002", the ADR says "enforced via NFR-0002". If the room wants a second worked pair, use the one on the takeaway card (enforcing-a-convention.md): "all backends must use SQLite" — ADR holds the decision, NFR holds the must + a CI dependency-scan check, and the word ALL makes it Collective-layer, which previews the sixth artifact. The CLAUDE.md row quotes the file verbatim on purpose — open it live if anyone doubts. ~5 min.</a:t>
+              <a:t>THE slide of the block — spend time here. Walk the same subject across all five rows, then land the one-word summary. If someone says "that is a lot of documents for one rule" — good: you would not write all five; you write the one that answers the question you actually have. EXPECT the pairing question ("does every NFR have an ADR?"): no, and no — they pair ONLY when one subject has both a contested decision AND a checkable standing rule, like this boundary. NFR-0001 has no ADR (hygiene, not a decision); a cloud-choice ADR would have no NFR (nothing to check per PR). When both exist they cross-reference, never duplicate: the NFR says "rationale: ADR-0002", the ADR says "enforced via NFR-0002". If the room wants a second worked pair, use the one on the takeaway card (enforcing-a-convention.md): "all backends must use SQLite" — ADR holds the decision, NFR holds the must + a CI dependency-scan check, and the word ALL makes it Collective-layer, which previews the sixth artifact. The CLAUDE.md row quotes the file verbatim on purpose — open it live if anyone doubts.</a:t>
+            </a:r>
+          </a:p>
+          <a:p/>
+          <a:p>
+            <a:r>
+              <a:t>~5 min.</a:t>
             </a:r>
           </a:p>
         </p:txBody>
@@ -2421,7 +3276,13 @@
           <a:lstStyle/>
           <a:p>
             <a:r>
-              <a:t>Do not read all 30 cells. Two rows do the work: "carries a check" isolates the NFR — the only artifact obliged to say how compliance is verified, the bridge to 2.b — and "when it loads" separates the two context files from the three documents. Then read the footnote aloud: the quick test is the take-home, and one-home-per-fact is the failure mode that kills governance corpora. Recipes and rules files get no further slide — the handout covers them. ~4 min.</a:t>
+              <a:t>Do not read all 30 cells. Two rows do the work: "carries a check" isolates the NFR — the only artifact obliged to say how compliance is verified, the bridge to 2.b — and "when it loads" separates the two context files from the three documents. Then read the footnote aloud: the quick test is the take-home, and one-home-per-fact is the failure mode that kills governance corpora. Recipes and rules files get no further slide — the handout covers them.</a:t>
+            </a:r>
+          </a:p>
+          <a:p/>
+          <a:p>
+            <a:r>
+              <a:t>~4 min.</a:t>
             </a:r>
           </a:p>
         </p:txBody>
@@ -2491,7 +3352,13 @@
           <a:lstStyle/>
           <a:p>
             <a:r>
-              <a:t>Land the continuity first — this is NOT new: 1.a taught POINTER = LAZY vs @IMPORT = EAGER, and said "give a clear trigger — before X, read Y." The table is that one line as rows: situation -&gt; pointer. A lazy pointer WITHOUT a trigger is a link the agent may never follow; the trigger is the firing condition that makes lazy reliable. Then pre-empt the objection: they saw a 72-line CLAUDE.md in 1.a and will meet 500-line ones in the wild. Both are correct at their scale; the trigger table is what makes the difference. Phrase triggers as situations, not topics — the agent matches on what it is doing. The last bullet is the third rung, one sentence only: past a few dozen docs, per-repo copies drift and even the trigger table bloats — so the docs get ONE canonical home and consumers QUERY it (a search tool over the governance repo, or a small docs service the agent calls). The mature corpus we cite runs 137 docs that way. Do not teach the mechanics here — the distribution guide 2.b hands over covers them; it puts the crossover at roughly 20+ docs. ~2 min.</a:t>
+              <a:t>Land the continuity first — this is NOT new: 1.a taught POINTER = LAZY vs @IMPORT = EAGER, and said "give a clear trigger — before X, read Y." The table is that one line as rows: situation -&gt; pointer. A lazy pointer WITHOUT a trigger is a link the agent may never follow; the trigger is the firing condition that makes lazy reliable. Then pre-empt the objection: they saw a 72-line CLAUDE.md in 1.a and will meet 500-line ones in the wild. Both are correct at their scale; the trigger table is what makes the difference. Phrase triggers as situations, not topics — the agent matches on what it is doing. The last bullet is the third rung, one sentence only: past a few dozen docs, per-repo copies drift and even the trigger table bloats — so the docs get ONE canonical home and consumers QUERY it (a search tool over the governance repo, or a small docs service the agent calls). The mature corpus we cite runs 137 docs that way. Do not teach the mechanics here — the distribution guide 2.b hands over covers them; it puts the crossover at roughly 20+ docs.</a:t>
+            </a:r>
+          </a:p>
+          <a:p/>
+          <a:p>
+            <a:r>
+              <a:t>~2 min.</a:t>
             </a:r>
           </a:p>
         </p:txBody>
@@ -2561,7 +3428,13 @@
           <a:lstStyle/>
           <a:p>
             <a:r>
-              <a:t>Do not sell the heavy forms. The one nuance: your NFR today is deliberately mid-ladder — the handout gives the clause + "Checked by:" skeleton, which NFR-0001 predates. Fun fact for the room: a mature corpus we know contains an ADR recording its own choice of ADR format — the format itself is a decision. ~2 min.</a:t>
+              <a:t>Do not sell the heavy forms. The one nuance: your NFR today is deliberately mid-ladder — the handout gives the clause + "Checked by:" skeleton, which NFR-0001 predates. Fun fact for the room: a mature corpus we know contains an ADR recording its own choice of ADR format — the format itself is a decision.</a:t>
+            </a:r>
+          </a:p>
+          <a:p/>
+          <a:p>
+            <a:r>
+              <a:t>~2 min.</a:t>
             </a:r>
           </a:p>
         </p:txBody>
@@ -22416,7 +23289,7 @@
                 </a:solidFill>
                 <a:latin typeface="Arial"/>
               </a:rPr>
-              <a:t>REVIEW &amp; RETRO</a:t>
+              <a:t>WIRE IT IN</a:t>
             </a:r>
           </a:p>
         </p:txBody>
@@ -22455,7 +23328,7 @@
                 </a:solidFill>
                 <a:latin typeface="Arial"/>
               </a:rPr>
-              <a:t>Compare, reflect, capture</a:t>
+              <a:t>One rule, one home, four references</a:t>
             </a:r>
           </a:p>
         </p:txBody>
@@ -22497,7 +23370,7 @@
                 </a:solidFill>
                 <a:latin typeface="Arial"/>
               </a:rPr>
-              <a:t>Five minutes that make the difference between an exercise and a practice.</a:t>
+              <a:t>The NFR document is the one home of the full law. Everything else points at it — each reference with a different job.</a:t>
             </a:r>
           </a:p>
         </p:txBody>
@@ -22543,171 +23416,883 @@
       </p:sp>
       <p:sp>
         <p:nvSpPr>
-          <p:cNvPr id="9" name="TextBox 8"/>
-          <p:cNvSpPr txBox="1"/>
-          <p:nvPr/>
-        </p:nvSpPr>
-        <p:spPr>
-          <a:xfrm>
-            <a:off x="548640" y="1783080"/>
-            <a:ext cx="7863840" cy="2935224"/>
-          </a:xfrm>
-          <a:prstGeom prst="rect">
-            <a:avLst/>
-          </a:prstGeom>
-          <a:noFill/>
-        </p:spPr>
-        <p:txBody>
-          <a:bodyPr wrap="square" anchor="t" lIns="0" rIns="0" tIns="0" bIns="0">
-            <a:spAutoFit/>
-          </a:bodyPr>
-          <a:lstStyle/>
-          <a:p>
-            <a:pPr algn="l">
-              <a:lnSpc>
-                <a:spcPct val="122000"/>
-              </a:lnSpc>
-              <a:spcAft>
-                <a:spcPts val="900"/>
-              </a:spcAft>
-            </a:pPr>
-            <a:r>
-              <a:rPr sz="1250" b="1">
-                <a:solidFill>
-                  <a:srgbClr val="403FE8"/>
-                </a:solidFill>
-                <a:latin typeface="Arial"/>
-              </a:rPr>
-              <a:t>•  </a:t>
-            </a:r>
-            <a:r>
-              <a:rPr sz="1250" b="1">
+          <p:cNvPr id="9" name="Rectangle 8"/>
+          <p:cNvSpPr/>
+          <p:nvPr/>
+        </p:nvSpPr>
+        <p:spPr>
+          <a:xfrm>
+            <a:off x="548640" y="2011680"/>
+            <a:ext cx="8046720" cy="310896"/>
+          </a:xfrm>
+          <a:prstGeom prst="rect">
+            <a:avLst/>
+          </a:prstGeom>
+          <a:solidFill>
+            <a:srgbClr val="403FE8"/>
+          </a:solidFill>
+          <a:ln>
+            <a:noFill/>
+          </a:ln>
+          <a:effectLst/>
+        </p:spPr>
+        <p:style>
+          <a:lnRef idx="1">
+            <a:schemeClr val="accent1"/>
+          </a:lnRef>
+          <a:fillRef idx="3">
+            <a:schemeClr val="accent1"/>
+          </a:fillRef>
+          <a:effectRef idx="2">
+            <a:schemeClr val="accent1"/>
+          </a:effectRef>
+          <a:fontRef idx="minor">
+            <a:schemeClr val="lt1"/>
+          </a:fontRef>
+        </p:style>
+        <p:txBody>
+          <a:bodyPr rtlCol="0" anchor="ctr"/>
+          <a:lstStyle/>
+          <a:p>
+            <a:pPr algn="ctr"/>
+          </a:p>
+        </p:txBody>
+      </p:sp>
+      <p:sp>
+        <p:nvSpPr>
+          <p:cNvPr id="10" name="TextBox 9"/>
+          <p:cNvSpPr txBox="1"/>
+          <p:nvPr/>
+        </p:nvSpPr>
+        <p:spPr>
+          <a:xfrm>
+            <a:off x="640080" y="2089404"/>
+            <a:ext cx="1645920" cy="219456"/>
+          </a:xfrm>
+          <a:prstGeom prst="rect">
+            <a:avLst/>
+          </a:prstGeom>
+          <a:noFill/>
+        </p:spPr>
+        <p:txBody>
+          <a:bodyPr wrap="square" anchor="t" lIns="0" rIns="0" tIns="0" bIns="0">
+            <a:spAutoFit/>
+          </a:bodyPr>
+          <a:lstStyle/>
+          <a:p>
+            <a:pPr algn="l">
+              <a:spcAft>
+                <a:spcPts val="400"/>
+              </a:spcAft>
+            </a:pPr>
+            <a:r>
+              <a:rPr sz="900" b="1">
+                <a:solidFill>
+                  <a:srgbClr val="FFFFFF"/>
+                </a:solidFill>
+                <a:latin typeface="Arial"/>
+              </a:rPr>
+              <a:t>Reference</a:t>
+            </a:r>
+          </a:p>
+        </p:txBody>
+      </p:sp>
+      <p:sp>
+        <p:nvSpPr>
+          <p:cNvPr id="11" name="TextBox 10"/>
+          <p:cNvSpPr txBox="1"/>
+          <p:nvPr/>
+        </p:nvSpPr>
+        <p:spPr>
+          <a:xfrm>
+            <a:off x="2468880" y="2089404"/>
+            <a:ext cx="3108960" cy="219456"/>
+          </a:xfrm>
+          <a:prstGeom prst="rect">
+            <a:avLst/>
+          </a:prstGeom>
+          <a:noFill/>
+        </p:spPr>
+        <p:txBody>
+          <a:bodyPr wrap="square" anchor="t" lIns="0" rIns="0" tIns="0" bIns="0">
+            <a:spAutoFit/>
+          </a:bodyPr>
+          <a:lstStyle/>
+          <a:p>
+            <a:pPr algn="l">
+              <a:spcAft>
+                <a:spcPts val="400"/>
+              </a:spcAft>
+            </a:pPr>
+            <a:r>
+              <a:rPr sz="900" b="1">
+                <a:solidFill>
+                  <a:srgbClr val="FFFFFF"/>
+                </a:solidFill>
+                <a:latin typeface="Arial"/>
+              </a:rPr>
+              <a:t>The line itself</a:t>
+            </a:r>
+          </a:p>
+        </p:txBody>
+      </p:sp>
+      <p:sp>
+        <p:nvSpPr>
+          <p:cNvPr id="12" name="TextBox 11"/>
+          <p:cNvSpPr txBox="1"/>
+          <p:nvPr/>
+        </p:nvSpPr>
+        <p:spPr>
+          <a:xfrm>
+            <a:off x="5760720" y="2089404"/>
+            <a:ext cx="2743200" cy="219456"/>
+          </a:xfrm>
+          <a:prstGeom prst="rect">
+            <a:avLst/>
+          </a:prstGeom>
+          <a:noFill/>
+        </p:spPr>
+        <p:txBody>
+          <a:bodyPr wrap="square" anchor="t" lIns="0" rIns="0" tIns="0" bIns="0">
+            <a:spAutoFit/>
+          </a:bodyPr>
+          <a:lstStyle/>
+          <a:p>
+            <a:pPr algn="l">
+              <a:spcAft>
+                <a:spcPts val="400"/>
+              </a:spcAft>
+            </a:pPr>
+            <a:r>
+              <a:rPr sz="900" b="1">
+                <a:solidFill>
+                  <a:srgbClr val="FFFFFF"/>
+                </a:solidFill>
+                <a:latin typeface="Arial"/>
+              </a:rPr>
+              <a:t>What it does</a:t>
+            </a:r>
+          </a:p>
+        </p:txBody>
+      </p:sp>
+      <p:sp>
+        <p:nvSpPr>
+          <p:cNvPr id="13" name="Rectangle 12"/>
+          <p:cNvSpPr/>
+          <p:nvPr/>
+        </p:nvSpPr>
+        <p:spPr>
+          <a:xfrm>
+            <a:off x="548640" y="2322576"/>
+            <a:ext cx="8046720" cy="475488"/>
+          </a:xfrm>
+          <a:prstGeom prst="rect">
+            <a:avLst/>
+          </a:prstGeom>
+          <a:solidFill>
+            <a:srgbClr val="F4F5FB"/>
+          </a:solidFill>
+          <a:ln>
+            <a:noFill/>
+          </a:ln>
+          <a:effectLst/>
+        </p:spPr>
+        <p:style>
+          <a:lnRef idx="1">
+            <a:schemeClr val="accent1"/>
+          </a:lnRef>
+          <a:fillRef idx="3">
+            <a:schemeClr val="accent1"/>
+          </a:fillRef>
+          <a:effectRef idx="2">
+            <a:schemeClr val="accent1"/>
+          </a:effectRef>
+          <a:fontRef idx="minor">
+            <a:schemeClr val="lt1"/>
+          </a:fontRef>
+        </p:style>
+        <p:txBody>
+          <a:bodyPr rtlCol="0" anchor="ctr"/>
+          <a:lstStyle/>
+          <a:p>
+            <a:pPr algn="ctr"/>
+          </a:p>
+        </p:txBody>
+      </p:sp>
+      <p:sp>
+        <p:nvSpPr>
+          <p:cNvPr id="14" name="TextBox 13"/>
+          <p:cNvSpPr txBox="1"/>
+          <p:nvPr/>
+        </p:nvSpPr>
+        <p:spPr>
+          <a:xfrm>
+            <a:off x="640080" y="2377440"/>
+            <a:ext cx="1645920" cy="384048"/>
+          </a:xfrm>
+          <a:prstGeom prst="rect">
+            <a:avLst/>
+          </a:prstGeom>
+          <a:noFill/>
+        </p:spPr>
+        <p:txBody>
+          <a:bodyPr wrap="square" anchor="t" lIns="0" rIns="0" tIns="0" bIns="0">
+            <a:spAutoFit/>
+          </a:bodyPr>
+          <a:lstStyle/>
+          <a:p>
+            <a:pPr algn="l">
+              <a:lnSpc>
+                <a:spcPct val="112000"/>
+              </a:lnSpc>
+              <a:spcAft>
+                <a:spcPts val="400"/>
+              </a:spcAft>
+            </a:pPr>
+            <a:r>
+              <a:rPr sz="900" b="1">
                 <a:solidFill>
                   <a:srgbClr val="13135E"/>
                 </a:solidFill>
                 <a:latin typeface="Arial"/>
               </a:rPr>
-              <a:t>Two volunteers, two NFRs. </a:t>
-            </a:r>
-            <a:r>
-              <a:rPr sz="1250" b="0">
+              <a:t>Binding line · layer 1</a:t>
+            </a:r>
+          </a:p>
+        </p:txBody>
+      </p:sp>
+      <p:sp>
+        <p:nvSpPr>
+          <p:cNvPr id="15" name="TextBox 14"/>
+          <p:cNvSpPr txBox="1"/>
+          <p:nvPr/>
+        </p:nvSpPr>
+        <p:spPr>
+          <a:xfrm>
+            <a:off x="2468880" y="2377440"/>
+            <a:ext cx="3108960" cy="384048"/>
+          </a:xfrm>
+          <a:prstGeom prst="rect">
+            <a:avLst/>
+          </a:prstGeom>
+          <a:noFill/>
+        </p:spPr>
+        <p:txBody>
+          <a:bodyPr wrap="square" anchor="t" lIns="0" rIns="0" tIns="0" bIns="0">
+            <a:spAutoFit/>
+          </a:bodyPr>
+          <a:lstStyle/>
+          <a:p>
+            <a:pPr algn="l">
+              <a:lnSpc>
+                <a:spcPct val="112000"/>
+              </a:lnSpc>
+              <a:spcAft>
+                <a:spcPts val="400"/>
+              </a:spcAft>
+            </a:pPr>
+            <a:r>
+              <a:rPr sz="800" b="0">
                 <a:solidFill>
                   <a:srgbClr val="434343"/>
                 </a:solidFill>
-                <a:latin typeface="Arial"/>
-              </a:rPr>
-              <a:t>Same clause list, different documents — screen-share each: what did they choose to check, and what did they mark?</a:t>
-            </a:r>
-          </a:p>
-          <a:p>
-            <a:pPr algn="l">
-              <a:lnSpc>
-                <a:spcPct val="122000"/>
-              </a:lnSpc>
-              <a:spcAft>
-                <a:spcPts val="900"/>
-              </a:spcAft>
-            </a:pPr>
-            <a:r>
-              <a:rPr sz="1250" b="1">
-                <a:solidFill>
-                  <a:srgbClr val="403FE8"/>
-                </a:solidFill>
-                <a:latin typeface="Arial"/>
-              </a:rPr>
-              <a:t>•  </a:t>
-            </a:r>
-            <a:r>
-              <a:rPr sz="1250" b="1">
+                <a:latin typeface="Consolas"/>
+              </a:rPr>
+              <a:t>- Do: every change under server/src ships with a test in the same PR (NFR-0002)</a:t>
+            </a:r>
+          </a:p>
+        </p:txBody>
+      </p:sp>
+      <p:sp>
+        <p:nvSpPr>
+          <p:cNvPr id="16" name="TextBox 15"/>
+          <p:cNvSpPr txBox="1"/>
+          <p:nvPr/>
+        </p:nvSpPr>
+        <p:spPr>
+          <a:xfrm>
+            <a:off x="5760720" y="2377440"/>
+            <a:ext cx="2743200" cy="384048"/>
+          </a:xfrm>
+          <a:prstGeom prst="rect">
+            <a:avLst/>
+          </a:prstGeom>
+          <a:noFill/>
+        </p:spPr>
+        <p:txBody>
+          <a:bodyPr wrap="square" anchor="t" lIns="0" rIns="0" tIns="0" bIns="0">
+            <a:spAutoFit/>
+          </a:bodyPr>
+          <a:lstStyle/>
+          <a:p>
+            <a:pPr algn="l">
+              <a:lnSpc>
+                <a:spcPct val="112000"/>
+              </a:lnSpc>
+              <a:spcAft>
+                <a:spcPts val="400"/>
+              </a:spcAft>
+            </a:pPr>
+            <a:r>
+              <a:rPr sz="900" b="0">
+                <a:solidFill>
+                  <a:srgbClr val="434343"/>
+                </a:solidFill>
+                <a:latin typeface="Arial"/>
+              </a:rPr>
+              <a:t>States the rule, always present. Informs every session</a:t>
+            </a:r>
+          </a:p>
+        </p:txBody>
+      </p:sp>
+      <p:sp>
+        <p:nvSpPr>
+          <p:cNvPr id="17" name="Rectangle 16"/>
+          <p:cNvSpPr/>
+          <p:nvPr/>
+        </p:nvSpPr>
+        <p:spPr>
+          <a:xfrm>
+            <a:off x="548640" y="2798064"/>
+            <a:ext cx="8046720" cy="475488"/>
+          </a:xfrm>
+          <a:prstGeom prst="rect">
+            <a:avLst/>
+          </a:prstGeom>
+          <a:solidFill>
+            <a:srgbClr val="FFFFFF"/>
+          </a:solidFill>
+          <a:ln>
+            <a:noFill/>
+          </a:ln>
+          <a:effectLst/>
+        </p:spPr>
+        <p:style>
+          <a:lnRef idx="1">
+            <a:schemeClr val="accent1"/>
+          </a:lnRef>
+          <a:fillRef idx="3">
+            <a:schemeClr val="accent1"/>
+          </a:fillRef>
+          <a:effectRef idx="2">
+            <a:schemeClr val="accent1"/>
+          </a:effectRef>
+          <a:fontRef idx="minor">
+            <a:schemeClr val="lt1"/>
+          </a:fontRef>
+        </p:style>
+        <p:txBody>
+          <a:bodyPr rtlCol="0" anchor="ctr"/>
+          <a:lstStyle/>
+          <a:p>
+            <a:pPr algn="ctr"/>
+          </a:p>
+        </p:txBody>
+      </p:sp>
+      <p:sp>
+        <p:nvSpPr>
+          <p:cNvPr id="18" name="TextBox 17"/>
+          <p:cNvSpPr txBox="1"/>
+          <p:nvPr/>
+        </p:nvSpPr>
+        <p:spPr>
+          <a:xfrm>
+            <a:off x="640080" y="2852928"/>
+            <a:ext cx="1645920" cy="384048"/>
+          </a:xfrm>
+          <a:prstGeom prst="rect">
+            <a:avLst/>
+          </a:prstGeom>
+          <a:noFill/>
+        </p:spPr>
+        <p:txBody>
+          <a:bodyPr wrap="square" anchor="t" lIns="0" rIns="0" tIns="0" bIns="0">
+            <a:spAutoFit/>
+          </a:bodyPr>
+          <a:lstStyle/>
+          <a:p>
+            <a:pPr algn="l">
+              <a:lnSpc>
+                <a:spcPct val="112000"/>
+              </a:lnSpc>
+              <a:spcAft>
+                <a:spcPts val="400"/>
+              </a:spcAft>
+            </a:pPr>
+            <a:r>
+              <a:rPr sz="900" b="1">
                 <a:solidFill>
                   <a:srgbClr val="13135E"/>
                 </a:solidFill>
                 <a:latin typeface="Arial"/>
               </a:rPr>
-              <a:t>One retro question. </a:t>
-            </a:r>
-            <a:r>
-              <a:rPr sz="1250" b="0">
+              <a:t>Trigger row · layer 1</a:t>
+            </a:r>
+          </a:p>
+        </p:txBody>
+      </p:sp>
+      <p:sp>
+        <p:nvSpPr>
+          <p:cNvPr id="19" name="TextBox 18"/>
+          <p:cNvSpPr txBox="1"/>
+          <p:nvPr/>
+        </p:nvSpPr>
+        <p:spPr>
+          <a:xfrm>
+            <a:off x="2468880" y="2852928"/>
+            <a:ext cx="3108960" cy="384048"/>
+          </a:xfrm>
+          <a:prstGeom prst="rect">
+            <a:avLst/>
+          </a:prstGeom>
+          <a:noFill/>
+        </p:spPr>
+        <p:txBody>
+          <a:bodyPr wrap="square" anchor="t" lIns="0" rIns="0" tIns="0" bIns="0">
+            <a:spAutoFit/>
+          </a:bodyPr>
+          <a:lstStyle/>
+          <a:p>
+            <a:pPr algn="l">
+              <a:lnSpc>
+                <a:spcPct val="112000"/>
+              </a:lnSpc>
+              <a:spcAft>
+                <a:spcPts val="400"/>
+              </a:spcAft>
+            </a:pPr>
+            <a:r>
+              <a:rPr sz="800" b="0">
                 <a:solidFill>
                   <a:srgbClr val="434343"/>
                 </a:solidFill>
-                <a:latin typeface="Arial"/>
-              </a:rPr>
-              <a:t>What was hard, what was easy? One line each in chat, waterfall style.</a:t>
-            </a:r>
-          </a:p>
-          <a:p>
-            <a:pPr algn="l">
-              <a:lnSpc>
-                <a:spcPct val="122000"/>
-              </a:lnSpc>
-              <a:spcAft>
-                <a:spcPts val="900"/>
-              </a:spcAft>
-            </a:pPr>
-            <a:r>
-              <a:rPr sz="1250" b="1">
-                <a:solidFill>
-                  <a:srgbClr val="403FE8"/>
-                </a:solidFill>
-                <a:latin typeface="Arial"/>
-              </a:rPr>
-              <a:t>•  </a:t>
-            </a:r>
-            <a:r>
-              <a:rPr sz="1250" b="1">
+                <a:latin typeface="Consolas"/>
+              </a:rPr>
+              <a:t>| Fixing a bug or adding behaviour | docs/nfr/0002... |</a:t>
+            </a:r>
+          </a:p>
+        </p:txBody>
+      </p:sp>
+      <p:sp>
+        <p:nvSpPr>
+          <p:cNvPr id="20" name="TextBox 19"/>
+          <p:cNvSpPr txBox="1"/>
+          <p:nvPr/>
+        </p:nvSpPr>
+        <p:spPr>
+          <a:xfrm>
+            <a:off x="5760720" y="2852928"/>
+            <a:ext cx="2743200" cy="384048"/>
+          </a:xfrm>
+          <a:prstGeom prst="rect">
+            <a:avLst/>
+          </a:prstGeom>
+          <a:noFill/>
+        </p:spPr>
+        <p:txBody>
+          <a:bodyPr wrap="square" anchor="t" lIns="0" rIns="0" tIns="0" bIns="0">
+            <a:spAutoFit/>
+          </a:bodyPr>
+          <a:lstStyle/>
+          <a:p>
+            <a:pPr algn="l">
+              <a:lnSpc>
+                <a:spcPct val="112000"/>
+              </a:lnSpc>
+              <a:spcAft>
+                <a:spcPts val="400"/>
+              </a:spcAft>
+            </a:pPr>
+            <a:r>
+              <a:rPr sz="900" b="0">
+                <a:solidFill>
+                  <a:srgbClr val="434343"/>
+                </a:solidFill>
+                <a:latin typeface="Arial"/>
+              </a:rPr>
+              <a:t>Loads the full NFR when its situation matches</a:t>
+            </a:r>
+          </a:p>
+        </p:txBody>
+      </p:sp>
+      <p:sp>
+        <p:nvSpPr>
+          <p:cNvPr id="21" name="Rectangle 20"/>
+          <p:cNvSpPr/>
+          <p:nvPr/>
+        </p:nvSpPr>
+        <p:spPr>
+          <a:xfrm>
+            <a:off x="548640" y="3273552"/>
+            <a:ext cx="8046720" cy="475488"/>
+          </a:xfrm>
+          <a:prstGeom prst="rect">
+            <a:avLst/>
+          </a:prstGeom>
+          <a:solidFill>
+            <a:srgbClr val="F4F5FB"/>
+          </a:solidFill>
+          <a:ln>
+            <a:noFill/>
+          </a:ln>
+          <a:effectLst/>
+        </p:spPr>
+        <p:style>
+          <a:lnRef idx="1">
+            <a:schemeClr val="accent1"/>
+          </a:lnRef>
+          <a:fillRef idx="3">
+            <a:schemeClr val="accent1"/>
+          </a:fillRef>
+          <a:effectRef idx="2">
+            <a:schemeClr val="accent1"/>
+          </a:effectRef>
+          <a:fontRef idx="minor">
+            <a:schemeClr val="lt1"/>
+          </a:fontRef>
+        </p:style>
+        <p:txBody>
+          <a:bodyPr rtlCol="0" anchor="ctr"/>
+          <a:lstStyle/>
+          <a:p>
+            <a:pPr algn="ctr"/>
+          </a:p>
+        </p:txBody>
+      </p:sp>
+      <p:sp>
+        <p:nvSpPr>
+          <p:cNvPr id="22" name="TextBox 21"/>
+          <p:cNvSpPr txBox="1"/>
+          <p:nvPr/>
+        </p:nvSpPr>
+        <p:spPr>
+          <a:xfrm>
+            <a:off x="640080" y="3328416"/>
+            <a:ext cx="1645920" cy="384048"/>
+          </a:xfrm>
+          <a:prstGeom prst="rect">
+            <a:avLst/>
+          </a:prstGeom>
+          <a:noFill/>
+        </p:spPr>
+        <p:txBody>
+          <a:bodyPr wrap="square" anchor="t" lIns="0" rIns="0" tIns="0" bIns="0">
+            <a:spAutoFit/>
+          </a:bodyPr>
+          <a:lstStyle/>
+          <a:p>
+            <a:pPr algn="l">
+              <a:lnSpc>
+                <a:spcPct val="112000"/>
+              </a:lnSpc>
+              <a:spcAft>
+                <a:spcPts val="400"/>
+              </a:spcAft>
+            </a:pPr>
+            <a:r>
+              <a:rPr sz="900" b="1">
                 <a:solidFill>
                   <a:srgbClr val="13135E"/>
                 </a:solidFill>
                 <a:latin typeface="Arial"/>
               </a:rPr>
-              <a:t>Reflection note — now, not later. </a:t>
-            </a:r>
-            <a:r>
-              <a:rPr sz="1250" b="0">
+              <a:t>Hook · layer 2 — next week</a:t>
+            </a:r>
+          </a:p>
+        </p:txBody>
+      </p:sp>
+      <p:sp>
+        <p:nvSpPr>
+          <p:cNvPr id="23" name="TextBox 22"/>
+          <p:cNvSpPr txBox="1"/>
+          <p:nvPr/>
+        </p:nvSpPr>
+        <p:spPr>
+          <a:xfrm>
+            <a:off x="2468880" y="3328416"/>
+            <a:ext cx="3108960" cy="384048"/>
+          </a:xfrm>
+          <a:prstGeom prst="rect">
+            <a:avLst/>
+          </a:prstGeom>
+          <a:noFill/>
+        </p:spPr>
+        <p:txBody>
+          <a:bodyPr wrap="square" anchor="t" lIns="0" rIns="0" tIns="0" bIns="0">
+            <a:spAutoFit/>
+          </a:bodyPr>
+          <a:lstStyle/>
+          <a:p>
+            <a:pPr algn="l">
+              <a:lnSpc>
+                <a:spcPct val="112000"/>
+              </a:lnSpc>
+              <a:spcAft>
+                <a:spcPts val="400"/>
+              </a:spcAft>
+            </a:pPr>
+            <a:r>
+              <a:rPr sz="800" b="0">
                 <a:solidFill>
                   <a:srgbClr val="434343"/>
                 </a:solidFill>
-                <a:latin typeface="Arial"/>
-              </a:rPr>
-              <a:t>3–5 sentences in your PR description: what you learned, what surprised you, what you'd apply tomorrow. It is an acceptance criterion.</a:t>
-            </a:r>
-          </a:p>
-          <a:p>
-            <a:pPr algn="l">
-              <a:lnSpc>
-                <a:spcPct val="122000"/>
-              </a:lnSpc>
-              <a:spcAft>
-                <a:spcPts val="900"/>
-              </a:spcAft>
-            </a:pPr>
-            <a:r>
-              <a:rPr sz="1250" b="1">
-                <a:solidFill>
-                  <a:srgbClr val="403FE8"/>
-                </a:solidFill>
-                <a:latin typeface="Arial"/>
-              </a:rPr>
-              <a:t>•  </a:t>
-            </a:r>
-            <a:r>
-              <a:rPr sz="1250" b="1">
+                <a:latin typeface="Consolas"/>
+              </a:rPr>
+              <a:t>(not in CLAUDE.md: .claude/hooks/ + settings.json)</a:t>
+            </a:r>
+          </a:p>
+        </p:txBody>
+      </p:sp>
+      <p:sp>
+        <p:nvSpPr>
+          <p:cNvPr id="24" name="TextBox 23"/>
+          <p:cNvSpPr txBox="1"/>
+          <p:nvPr/>
+        </p:nvSpPr>
+        <p:spPr>
+          <a:xfrm>
+            <a:off x="5760720" y="3328416"/>
+            <a:ext cx="2743200" cy="384048"/>
+          </a:xfrm>
+          <a:prstGeom prst="rect">
+            <a:avLst/>
+          </a:prstGeom>
+          <a:noFill/>
+        </p:spPr>
+        <p:txBody>
+          <a:bodyPr wrap="square" anchor="t" lIns="0" rIns="0" tIns="0" bIns="0">
+            <a:spAutoFit/>
+          </a:bodyPr>
+          <a:lstStyle/>
+          <a:p>
+            <a:pPr algn="l">
+              <a:lnSpc>
+                <a:spcPct val="112000"/>
+              </a:lnSpc>
+              <a:spcAft>
+                <a:spcPts val="400"/>
+              </a:spcAft>
+            </a:pPr>
+            <a:r>
+              <a:rPr sz="900" b="0">
+                <a:solidFill>
+                  <a:srgbClr val="434343"/>
+                </a:solidFill>
+                <a:latin typeface="Arial"/>
+              </a:rPr>
+              <a:t>Nudges the agent the moment an edit violates the clause</a:t>
+            </a:r>
+          </a:p>
+        </p:txBody>
+      </p:sp>
+      <p:sp>
+        <p:nvSpPr>
+          <p:cNvPr id="25" name="Rectangle 24"/>
+          <p:cNvSpPr/>
+          <p:nvPr/>
+        </p:nvSpPr>
+        <p:spPr>
+          <a:xfrm>
+            <a:off x="548640" y="3749039"/>
+            <a:ext cx="8046720" cy="475488"/>
+          </a:xfrm>
+          <a:prstGeom prst="rect">
+            <a:avLst/>
+          </a:prstGeom>
+          <a:solidFill>
+            <a:srgbClr val="FFFFFF"/>
+          </a:solidFill>
+          <a:ln>
+            <a:noFill/>
+          </a:ln>
+          <a:effectLst/>
+        </p:spPr>
+        <p:style>
+          <a:lnRef idx="1">
+            <a:schemeClr val="accent1"/>
+          </a:lnRef>
+          <a:fillRef idx="3">
+            <a:schemeClr val="accent1"/>
+          </a:fillRef>
+          <a:effectRef idx="2">
+            <a:schemeClr val="accent1"/>
+          </a:effectRef>
+          <a:fontRef idx="minor">
+            <a:schemeClr val="lt1"/>
+          </a:fontRef>
+        </p:style>
+        <p:txBody>
+          <a:bodyPr rtlCol="0" anchor="ctr"/>
+          <a:lstStyle/>
+          <a:p>
+            <a:pPr algn="ctr"/>
+          </a:p>
+        </p:txBody>
+      </p:sp>
+      <p:sp>
+        <p:nvSpPr>
+          <p:cNvPr id="26" name="TextBox 25"/>
+          <p:cNvSpPr txBox="1"/>
+          <p:nvPr/>
+        </p:nvSpPr>
+        <p:spPr>
+          <a:xfrm>
+            <a:off x="640080" y="3803903"/>
+            <a:ext cx="1645920" cy="384048"/>
+          </a:xfrm>
+          <a:prstGeom prst="rect">
+            <a:avLst/>
+          </a:prstGeom>
+          <a:noFill/>
+        </p:spPr>
+        <p:txBody>
+          <a:bodyPr wrap="square" anchor="t" lIns="0" rIns="0" tIns="0" bIns="0">
+            <a:spAutoFit/>
+          </a:bodyPr>
+          <a:lstStyle/>
+          <a:p>
+            <a:pPr algn="l">
+              <a:lnSpc>
+                <a:spcPct val="112000"/>
+              </a:lnSpc>
+              <a:spcAft>
+                <a:spcPts val="400"/>
+              </a:spcAft>
+            </a:pPr>
+            <a:r>
+              <a:rPr sz="900" b="1">
                 <a:solidFill>
                   <a:srgbClr val="13135E"/>
                 </a:solidFill>
                 <a:latin typeface="Arial"/>
               </a:rPr>
-              <a:t>Unfinished work finishes async. </a:t>
-            </a:r>
-            <a:r>
-              <a:rPr sz="1250" b="0">
+              <a:t>CI gate · layer 4 — next week</a:t>
+            </a:r>
+          </a:p>
+        </p:txBody>
+      </p:sp>
+      <p:sp>
+        <p:nvSpPr>
+          <p:cNvPr id="27" name="TextBox 26"/>
+          <p:cNvSpPr txBox="1"/>
+          <p:nvPr/>
+        </p:nvSpPr>
+        <p:spPr>
+          <a:xfrm>
+            <a:off x="2468880" y="3803903"/>
+            <a:ext cx="3108960" cy="384048"/>
+          </a:xfrm>
+          <a:prstGeom prst="rect">
+            <a:avLst/>
+          </a:prstGeom>
+          <a:noFill/>
+        </p:spPr>
+        <p:txBody>
+          <a:bodyPr wrap="square" anchor="t" lIns="0" rIns="0" tIns="0" bIns="0">
+            <a:spAutoFit/>
+          </a:bodyPr>
+          <a:lstStyle/>
+          <a:p>
+            <a:pPr algn="l">
+              <a:lnSpc>
+                <a:spcPct val="112000"/>
+              </a:lnSpc>
+              <a:spcAft>
+                <a:spcPts val="400"/>
+              </a:spcAft>
+            </a:pPr>
+            <a:r>
+              <a:rPr sz="800" b="0">
                 <a:solidFill>
                   <a:srgbClr val="434343"/>
                 </a:solidFill>
-                <a:latin typeface="Arial"/>
-              </a:rPr>
-              <a:t>Still required, still peer-reviewed — the list does not shrink because the clock ran out.</a:t>
+                <a:latin typeface="Consolas"/>
+              </a:rPr>
+              <a:t>(not in CLAUDE.md: .github/workflows/governance.yml)</a:t>
+            </a:r>
+          </a:p>
+        </p:txBody>
+      </p:sp>
+      <p:sp>
+        <p:nvSpPr>
+          <p:cNvPr id="28" name="TextBox 27"/>
+          <p:cNvSpPr txBox="1"/>
+          <p:nvPr/>
+        </p:nvSpPr>
+        <p:spPr>
+          <a:xfrm>
+            <a:off x="5760720" y="3803903"/>
+            <a:ext cx="2743200" cy="384048"/>
+          </a:xfrm>
+          <a:prstGeom prst="rect">
+            <a:avLst/>
+          </a:prstGeom>
+          <a:noFill/>
+        </p:spPr>
+        <p:txBody>
+          <a:bodyPr wrap="square" anchor="t" lIns="0" rIns="0" tIns="0" bIns="0">
+            <a:spAutoFit/>
+          </a:bodyPr>
+          <a:lstStyle/>
+          <a:p>
+            <a:pPr algn="l">
+              <a:lnSpc>
+                <a:spcPct val="112000"/>
+              </a:lnSpc>
+              <a:spcAft>
+                <a:spcPts val="400"/>
+              </a:spcAft>
+            </a:pPr>
+            <a:r>
+              <a:rPr sz="900" b="0">
+                <a:solidFill>
+                  <a:srgbClr val="434343"/>
+                </a:solidFill>
+                <a:latin typeface="Arial"/>
+              </a:rPr>
+              <a:t>Fails the PR that violates the clause — stops anyone</a:t>
+            </a:r>
+          </a:p>
+        </p:txBody>
+      </p:sp>
+      <p:sp>
+        <p:nvSpPr>
+          <p:cNvPr id="29" name="TextBox 28"/>
+          <p:cNvSpPr txBox="1"/>
+          <p:nvPr/>
+        </p:nvSpPr>
+        <p:spPr>
+          <a:xfrm>
+            <a:off x="548640" y="4315968"/>
+            <a:ext cx="7863840" cy="402336"/>
+          </a:xfrm>
+          <a:prstGeom prst="rect">
+            <a:avLst/>
+          </a:prstGeom>
+          <a:noFill/>
+        </p:spPr>
+        <p:txBody>
+          <a:bodyPr wrap="square" anchor="t" lIns="0" rIns="0" tIns="0" bIns="0">
+            <a:spAutoFit/>
+          </a:bodyPr>
+          <a:lstStyle/>
+          <a:p>
+            <a:pPr algn="l">
+              <a:lnSpc>
+                <a:spcPct val="120000"/>
+              </a:lnSpc>
+              <a:spcAft>
+                <a:spcPts val="400"/>
+              </a:spcAft>
+            </a:pPr>
+            <a:r>
+              <a:rPr sz="1000" b="0">
+                <a:solidFill>
+                  <a:srgbClr val="666666"/>
+                </a:solidFill>
+                <a:latin typeface="Arial"/>
+              </a:rPr>
+              <a:t>Layer 1 informs; layers 2–4 enforce — next week builds the bottom two rows for this same clause. Nothing built today validates anything.</a:t>
             </a:r>
           </a:p>
         </p:txBody>
@@ -23763,6 +25348,466 @@
 </file>
 
 <file path=ppt/slides/slide30.xml><?xml version="1.0" encoding="utf-8"?>
+<p:sld xmlns:a="http://schemas.openxmlformats.org/drawingml/2006/main" xmlns:p="http://schemas.openxmlformats.org/presentationml/2006/main" xmlns:r="http://schemas.openxmlformats.org/officeDocument/2006/relationships">
+  <p:cSld>
+    <p:spTree>
+      <p:nvGrpSpPr>
+        <p:cNvPr id="1" name=""/>
+        <p:cNvGrpSpPr/>
+        <p:nvPr/>
+      </p:nvGrpSpPr>
+      <p:grpSpPr/>
+      <p:sp>
+        <p:nvSpPr>
+          <p:cNvPr id="2" name="Rectangle 1"/>
+          <p:cNvSpPr/>
+          <p:nvPr/>
+        </p:nvSpPr>
+        <p:spPr>
+          <a:xfrm>
+            <a:off x="0" y="0"/>
+            <a:ext cx="9144000" cy="5143500"/>
+          </a:xfrm>
+          <a:prstGeom prst="rect">
+            <a:avLst/>
+          </a:prstGeom>
+          <a:solidFill>
+            <a:srgbClr val="FFFFFF"/>
+          </a:solidFill>
+          <a:ln>
+            <a:noFill/>
+          </a:ln>
+          <a:effectLst/>
+        </p:spPr>
+        <p:style>
+          <a:lnRef idx="1">
+            <a:schemeClr val="accent1"/>
+          </a:lnRef>
+          <a:fillRef idx="3">
+            <a:schemeClr val="accent1"/>
+          </a:fillRef>
+          <a:effectRef idx="2">
+            <a:schemeClr val="accent1"/>
+          </a:effectRef>
+          <a:fontRef idx="minor">
+            <a:schemeClr val="lt1"/>
+          </a:fontRef>
+        </p:style>
+        <p:txBody>
+          <a:bodyPr rtlCol="0" anchor="ctr"/>
+          <a:lstStyle/>
+          <a:p>
+            <a:pPr algn="ctr"/>
+          </a:p>
+        </p:txBody>
+      </p:sp>
+      <p:pic>
+        <p:nvPicPr>
+          <p:cNvPr id="3" name="Picture 2" descr="image3.png"/>
+          <p:cNvPicPr>
+            <a:picLocks noChangeAspect="1"/>
+          </p:cNvPicPr>
+          <p:nvPr/>
+        </p:nvPicPr>
+        <p:blipFill>
+          <a:blip r:embed="rId2"/>
+          <a:stretch>
+            <a:fillRect/>
+          </a:stretch>
+        </p:blipFill>
+        <p:spPr>
+          <a:xfrm>
+            <a:off x="8229600" y="411480"/>
+            <a:ext cx="713232" cy="384048"/>
+          </a:xfrm>
+          <a:prstGeom prst="rect">
+            <a:avLst/>
+          </a:prstGeom>
+        </p:spPr>
+      </p:pic>
+      <p:sp>
+        <p:nvSpPr>
+          <p:cNvPr id="4" name="Rectangle 3"/>
+          <p:cNvSpPr/>
+          <p:nvPr/>
+        </p:nvSpPr>
+        <p:spPr>
+          <a:xfrm>
+            <a:off x="548640" y="457200"/>
+            <a:ext cx="237744" cy="54864"/>
+          </a:xfrm>
+          <a:prstGeom prst="rect">
+            <a:avLst/>
+          </a:prstGeom>
+          <a:solidFill>
+            <a:srgbClr val="403FE8"/>
+          </a:solidFill>
+          <a:ln>
+            <a:noFill/>
+          </a:ln>
+          <a:effectLst/>
+        </p:spPr>
+        <p:style>
+          <a:lnRef idx="1">
+            <a:schemeClr val="accent1"/>
+          </a:lnRef>
+          <a:fillRef idx="3">
+            <a:schemeClr val="accent1"/>
+          </a:fillRef>
+          <a:effectRef idx="2">
+            <a:schemeClr val="accent1"/>
+          </a:effectRef>
+          <a:fontRef idx="minor">
+            <a:schemeClr val="lt1"/>
+          </a:fontRef>
+        </p:style>
+        <p:txBody>
+          <a:bodyPr rtlCol="0" anchor="ctr"/>
+          <a:lstStyle/>
+          <a:p>
+            <a:pPr algn="ctr"/>
+          </a:p>
+        </p:txBody>
+      </p:sp>
+      <p:sp>
+        <p:nvSpPr>
+          <p:cNvPr id="5" name="TextBox 4"/>
+          <p:cNvSpPr txBox="1"/>
+          <p:nvPr/>
+        </p:nvSpPr>
+        <p:spPr>
+          <a:xfrm>
+            <a:off x="868680" y="402336"/>
+            <a:ext cx="7132320" cy="274320"/>
+          </a:xfrm>
+          <a:prstGeom prst="rect">
+            <a:avLst/>
+          </a:prstGeom>
+          <a:noFill/>
+        </p:spPr>
+        <p:txBody>
+          <a:bodyPr wrap="square" anchor="t" lIns="0" rIns="0" tIns="0" bIns="0">
+            <a:spAutoFit/>
+          </a:bodyPr>
+          <a:lstStyle/>
+          <a:p>
+            <a:pPr algn="l">
+              <a:spcAft>
+                <a:spcPts val="400"/>
+              </a:spcAft>
+            </a:pPr>
+            <a:r>
+              <a:rPr sz="950" b="1">
+                <a:solidFill>
+                  <a:srgbClr val="403FE8"/>
+                </a:solidFill>
+                <a:latin typeface="Arial"/>
+              </a:rPr>
+              <a:t>REVIEW &amp; RETRO</a:t>
+            </a:r>
+          </a:p>
+        </p:txBody>
+      </p:sp>
+      <p:sp>
+        <p:nvSpPr>
+          <p:cNvPr id="6" name="TextBox 5"/>
+          <p:cNvSpPr txBox="1"/>
+          <p:nvPr/>
+        </p:nvSpPr>
+        <p:spPr>
+          <a:xfrm>
+            <a:off x="548640" y="658368"/>
+            <a:ext cx="7589520" cy="566928"/>
+          </a:xfrm>
+          <a:prstGeom prst="rect">
+            <a:avLst/>
+          </a:prstGeom>
+          <a:noFill/>
+        </p:spPr>
+        <p:txBody>
+          <a:bodyPr wrap="square" anchor="t" lIns="0" rIns="0" tIns="0" bIns="0">
+            <a:spAutoFit/>
+          </a:bodyPr>
+          <a:lstStyle/>
+          <a:p>
+            <a:pPr algn="l">
+              <a:spcAft>
+                <a:spcPts val="400"/>
+              </a:spcAft>
+            </a:pPr>
+            <a:r>
+              <a:rPr sz="2500" b="1">
+                <a:solidFill>
+                  <a:srgbClr val="13135E"/>
+                </a:solidFill>
+                <a:latin typeface="Arial"/>
+              </a:rPr>
+              <a:t>Compare, reflect, capture</a:t>
+            </a:r>
+          </a:p>
+        </p:txBody>
+      </p:sp>
+      <p:sp>
+        <p:nvSpPr>
+          <p:cNvPr id="7" name="TextBox 6"/>
+          <p:cNvSpPr txBox="1"/>
+          <p:nvPr/>
+        </p:nvSpPr>
+        <p:spPr>
+          <a:xfrm>
+            <a:off x="548640" y="1316736"/>
+            <a:ext cx="7863840" cy="566928"/>
+          </a:xfrm>
+          <a:prstGeom prst="rect">
+            <a:avLst/>
+          </a:prstGeom>
+          <a:noFill/>
+        </p:spPr>
+        <p:txBody>
+          <a:bodyPr wrap="square" anchor="t" lIns="0" rIns="0" tIns="0" bIns="0">
+            <a:spAutoFit/>
+          </a:bodyPr>
+          <a:lstStyle/>
+          <a:p>
+            <a:pPr algn="l">
+              <a:lnSpc>
+                <a:spcPct val="125000"/>
+              </a:lnSpc>
+              <a:spcAft>
+                <a:spcPts val="400"/>
+              </a:spcAft>
+            </a:pPr>
+            <a:r>
+              <a:rPr sz="1200" b="0">
+                <a:solidFill>
+                  <a:srgbClr val="434343"/>
+                </a:solidFill>
+                <a:latin typeface="Arial"/>
+              </a:rPr>
+              <a:t>Five minutes that make the difference between an exercise and a practice.</a:t>
+            </a:r>
+          </a:p>
+        </p:txBody>
+      </p:sp>
+      <p:sp>
+        <p:nvSpPr>
+          <p:cNvPr id="8" name="TextBox 7"/>
+          <p:cNvSpPr txBox="1"/>
+          <p:nvPr/>
+        </p:nvSpPr>
+        <p:spPr>
+          <a:xfrm>
+            <a:off x="548640" y="4846320"/>
+            <a:ext cx="7315200" cy="219456"/>
+          </a:xfrm>
+          <a:prstGeom prst="rect">
+            <a:avLst/>
+          </a:prstGeom>
+          <a:noFill/>
+        </p:spPr>
+        <p:txBody>
+          <a:bodyPr wrap="square" anchor="t" lIns="0" rIns="0" tIns="0" bIns="0">
+            <a:spAutoFit/>
+          </a:bodyPr>
+          <a:lstStyle/>
+          <a:p>
+            <a:pPr algn="l">
+              <a:spcAft>
+                <a:spcPts val="400"/>
+              </a:spcAft>
+            </a:pPr>
+            <a:r>
+              <a:rPr sz="800" b="0">
+                <a:solidFill>
+                  <a:srgbClr val="999999"/>
+                </a:solidFill>
+                <a:latin typeface="Arial"/>
+              </a:rPr>
+              <a:t>FSL AI Training · Lab 2.a — Writing the Standards Down</a:t>
+            </a:r>
+          </a:p>
+        </p:txBody>
+      </p:sp>
+      <p:sp>
+        <p:nvSpPr>
+          <p:cNvPr id="9" name="TextBox 8"/>
+          <p:cNvSpPr txBox="1"/>
+          <p:nvPr/>
+        </p:nvSpPr>
+        <p:spPr>
+          <a:xfrm>
+            <a:off x="548640" y="1783080"/>
+            <a:ext cx="7863840" cy="2935224"/>
+          </a:xfrm>
+          <a:prstGeom prst="rect">
+            <a:avLst/>
+          </a:prstGeom>
+          <a:noFill/>
+        </p:spPr>
+        <p:txBody>
+          <a:bodyPr wrap="square" anchor="t" lIns="0" rIns="0" tIns="0" bIns="0">
+            <a:spAutoFit/>
+          </a:bodyPr>
+          <a:lstStyle/>
+          <a:p>
+            <a:pPr algn="l">
+              <a:lnSpc>
+                <a:spcPct val="122000"/>
+              </a:lnSpc>
+              <a:spcAft>
+                <a:spcPts val="900"/>
+              </a:spcAft>
+            </a:pPr>
+            <a:r>
+              <a:rPr sz="1250" b="1">
+                <a:solidFill>
+                  <a:srgbClr val="403FE8"/>
+                </a:solidFill>
+                <a:latin typeface="Arial"/>
+              </a:rPr>
+              <a:t>•  </a:t>
+            </a:r>
+            <a:r>
+              <a:rPr sz="1250" b="1">
+                <a:solidFill>
+                  <a:srgbClr val="13135E"/>
+                </a:solidFill>
+                <a:latin typeface="Arial"/>
+              </a:rPr>
+              <a:t>Two volunteers, two NFRs. </a:t>
+            </a:r>
+            <a:r>
+              <a:rPr sz="1250" b="0">
+                <a:solidFill>
+                  <a:srgbClr val="434343"/>
+                </a:solidFill>
+                <a:latin typeface="Arial"/>
+              </a:rPr>
+              <a:t>Same clause list, different documents — screen-share each: what did they choose to check, and what did they mark?</a:t>
+            </a:r>
+          </a:p>
+          <a:p>
+            <a:pPr algn="l">
+              <a:lnSpc>
+                <a:spcPct val="122000"/>
+              </a:lnSpc>
+              <a:spcAft>
+                <a:spcPts val="900"/>
+              </a:spcAft>
+            </a:pPr>
+            <a:r>
+              <a:rPr sz="1250" b="1">
+                <a:solidFill>
+                  <a:srgbClr val="403FE8"/>
+                </a:solidFill>
+                <a:latin typeface="Arial"/>
+              </a:rPr>
+              <a:t>•  </a:t>
+            </a:r>
+            <a:r>
+              <a:rPr sz="1250" b="1">
+                <a:solidFill>
+                  <a:srgbClr val="13135E"/>
+                </a:solidFill>
+                <a:latin typeface="Arial"/>
+              </a:rPr>
+              <a:t>One retro question. </a:t>
+            </a:r>
+            <a:r>
+              <a:rPr sz="1250" b="0">
+                <a:solidFill>
+                  <a:srgbClr val="434343"/>
+                </a:solidFill>
+                <a:latin typeface="Arial"/>
+              </a:rPr>
+              <a:t>What was hard, what was easy? One line each in chat, waterfall style.</a:t>
+            </a:r>
+          </a:p>
+          <a:p>
+            <a:pPr algn="l">
+              <a:lnSpc>
+                <a:spcPct val="122000"/>
+              </a:lnSpc>
+              <a:spcAft>
+                <a:spcPts val="900"/>
+              </a:spcAft>
+            </a:pPr>
+            <a:r>
+              <a:rPr sz="1250" b="1">
+                <a:solidFill>
+                  <a:srgbClr val="403FE8"/>
+                </a:solidFill>
+                <a:latin typeface="Arial"/>
+              </a:rPr>
+              <a:t>•  </a:t>
+            </a:r>
+            <a:r>
+              <a:rPr sz="1250" b="1">
+                <a:solidFill>
+                  <a:srgbClr val="13135E"/>
+                </a:solidFill>
+                <a:latin typeface="Arial"/>
+              </a:rPr>
+              <a:t>Reflection note — now, not later. </a:t>
+            </a:r>
+            <a:r>
+              <a:rPr sz="1250" b="0">
+                <a:solidFill>
+                  <a:srgbClr val="434343"/>
+                </a:solidFill>
+                <a:latin typeface="Arial"/>
+              </a:rPr>
+              <a:t>3–5 sentences in your PR description: what you learned, what surprised you, what you'd apply tomorrow. It is an acceptance criterion.</a:t>
+            </a:r>
+          </a:p>
+          <a:p>
+            <a:pPr algn="l">
+              <a:lnSpc>
+                <a:spcPct val="122000"/>
+              </a:lnSpc>
+              <a:spcAft>
+                <a:spcPts val="900"/>
+              </a:spcAft>
+            </a:pPr>
+            <a:r>
+              <a:rPr sz="1250" b="1">
+                <a:solidFill>
+                  <a:srgbClr val="403FE8"/>
+                </a:solidFill>
+                <a:latin typeface="Arial"/>
+              </a:rPr>
+              <a:t>•  </a:t>
+            </a:r>
+            <a:r>
+              <a:rPr sz="1250" b="1">
+                <a:solidFill>
+                  <a:srgbClr val="13135E"/>
+                </a:solidFill>
+                <a:latin typeface="Arial"/>
+              </a:rPr>
+              <a:t>Unfinished work finishes async. </a:t>
+            </a:r>
+            <a:r>
+              <a:rPr sz="1250" b="0">
+                <a:solidFill>
+                  <a:srgbClr val="434343"/>
+                </a:solidFill>
+                <a:latin typeface="Arial"/>
+              </a:rPr>
+              <a:t>Still required, still peer-reviewed — the list does not shrink because the clock ran out.</a:t>
+            </a:r>
+          </a:p>
+        </p:txBody>
+      </p:sp>
+    </p:spTree>
+  </p:cSld>
+  <p:clrMapOvr>
+    <a:masterClrMapping/>
+  </p:clrMapOvr>
+</p:sld>
+</file>
+
+<file path=ppt/slides/slide31.xml><?xml version="1.0" encoding="utf-8"?>
 <p:sld xmlns:a="http://schemas.openxmlformats.org/drawingml/2006/main" xmlns:p="http://schemas.openxmlformats.org/presentationml/2006/main" xmlns:r="http://schemas.openxmlformats.org/officeDocument/2006/relationships">
   <p:cSld>
     <p:spTree>

--- a/docs/instructor/lab-2a-writing-the-standards-down.pptx
+++ b/docs/instructor/lab-2a-writing-the-standards-down.pptx
@@ -2565,6 +2565,12 @@
           <a:p/>
           <a:p>
             <a:r>
+              <a:t>THE OBEY-TEST — the one-line discriminator when anyone mixes the two up: could you obey this line without opening another file? The binding line states the rule — you could comply for a year without reading the NFR. The trigger row contains no rule at all — you cannot obey it, only follow it. Run it live on NFR-0001's table row if the confusion surfaces: "calling an external API -&gt; read docs/nfr/0001" teaches you nothing about HOW to handle errors — directions, not a rule; that row is a trigger row, and NFR-0001 has no binding line at all.</a:t>
+            </a:r>
+          </a:p>
+          <a:p/>
+          <a:p>
+            <a:r>
               <a:t>TWO PATHS to the full document, and only one is designed: (1) the trigger row — the situation matches, the doc is read; this is the reliable path. (2) following the citation — Claude (or a person) mid-task decides it needs more than the headline and chases NFR-0002; possible because the citation exists, but voluntary — nothing forces it. Delete the trigger row and path 2 still exists, but now you are relying on Claude spontaneously deciding to look things up — hope-based governance, the exact thing this lab replaces.</a:t>
             </a:r>
           </a:p>
@@ -2732,7 +2738,7 @@
           <a:lstStyle/>
           <a:p>
             <a:r>
-              <a:t>The summary slide of the wire-in — read it BY JOBS, one row at a time, and let it preview 2.b. Two facts to land while reading. FIRST, one home per fact survives: none of the four references duplicates the law — the binding line states one headline sentence and cites the doc; the trigger row points at the doc; the hook and the gate re-encode ONE mechanical clause each, and a human writes that encoding — the gate does not read the NFR, it greps the diff for what the clause says. SECOND, the layer split: both CLAUDE.md rows are layer 1 — instruction, never validated, never enforced — and stay that way forever; enforcement arrives next week as SEPARATE artifacts at layers 2 and 4, and even then it is the OUTCOME of the clause that gets checked, never whether anything was read. If one table survives the block in their heads, it is this one.</a:t>
+              <a:t>The summary slide of the wire-in — read it BY JOBS, one row at a time, and let it preview 2.b. With the real lines on screen, run the OBEY-TEST out loud: could you comply with this line without opening another file? Row 1, yes — it IS the rule. Row 2, no — directions to the rule, not the rule. That one question is the whole binding-line / trigger-row distinction. Two facts to land while reading. FIRST, one home per fact survives: none of the four references duplicates the law — the binding line states one headline sentence and cites the doc; the trigger row points at the doc; the hook and the gate re-encode ONE mechanical clause each, and a human writes that encoding — the gate does not read the NFR, it greps the diff for what the clause says. SECOND, the layer split: both CLAUDE.md rows are layer 1 — instruction, never validated, never enforced — and stay that way forever; enforcement arrives next week as SEPARATE artifacts at layers 2 and 4, and even then it is the OUTCOME of the clause that gets checked, never whether anything was read. If one table survives the block in their heads, it is this one.</a:t>
             </a:r>
           </a:p>
           <a:p/>
